--- a/Courses/145060/units/unit-00-onboarding/04-slides/exports/MCCTC_145060_Slides_W02_OwnershipAndLicensing.pptx
+++ b/Courses/145060/units/unit-00-onboarding/04-slides/exports/MCCTC_145060_Slides_W02_OwnershipAndLicensing.pptx
@@ -33,20 +33,12 @@
       <p:regular r:id="rId201315"/>
     </p:embeddedFont>
     <p:embeddedFont>
-      <p:font typeface="Orbitron Black"/>
+      <p:font typeface="Roboto Condensed Bold"/>
       <p:regular r:id="rId201316"/>
     </p:embeddedFont>
     <p:embeddedFont>
-      <p:font typeface="Roboto Condensed Black"/>
+      <p:font typeface="Roboto Condensed"/>
       <p:regular r:id="rId201317"/>
-    </p:embeddedFont>
-    <p:embeddedFont>
-      <p:font typeface="Roboto Condensed Bold"/>
-      <p:regular r:id="rId201318"/>
-    </p:embeddedFont>
-    <p:embeddedFont>
-      <p:font typeface="Roboto Condensed"/>
-      <p:regular r:id="rId201319"/>
     </p:embeddedFont>
   </p:embeddedFontLst>
   <p:defaultTextStyle>
@@ -2048,7 +2040,7 @@
         </p:blipFill>
         <p:spPr>
           <a:xfrm>
-            <a:off x="0" y="0"/>
+            <a:off x="7619809" y="0"/>
             <a:ext cx="4571886" cy="6858000"/>
           </a:xfrm>
           <a:prstGeom prst="rect">
@@ -2064,7 +2056,7 @@
         </p:nvSpPr>
         <p:spPr>
           <a:xfrm>
-            <a:off x="5233360" y="1931194"/>
+            <a:off x="661475" y="1931194"/>
             <a:ext cx="6296860" cy="1181298"/>
           </a:xfrm>
           <a:prstGeom prst="rect">
@@ -2108,7 +2100,7 @@
         </p:nvSpPr>
         <p:spPr>
           <a:xfrm>
-            <a:off x="5233360" y="3395960"/>
+            <a:off x="661475" y="3395960"/>
             <a:ext cx="6296860" cy="1407914"/>
           </a:xfrm>
           <a:prstGeom prst="rect">
@@ -2118,7 +2110,7 @@
           <a:ln/>
         </p:spPr>
         <p:txBody>
-          <a:bodyPr wrap="square" lIns="0" tIns="75608" rIns="0" bIns="0" rtlCol="0" anchor="t">
+          <a:bodyPr wrap="square" lIns="0" tIns="0" rIns="0" bIns="0" rtlCol="0" anchor="t">
             <a:normAutofit/>
           </a:bodyPr>
           <a:lstStyle/>
@@ -2216,7 +2208,7 @@
         </p:nvSpPr>
         <p:spPr>
           <a:xfrm>
-            <a:off x="4704141" y="6457255"/>
+            <a:off x="132255" y="6457255"/>
             <a:ext cx="3640642" cy="158750"/>
           </a:xfrm>
           <a:prstGeom prst="rect">
@@ -2226,7 +2218,7 @@
           <a:ln/>
         </p:spPr>
         <p:txBody>
-          <a:bodyPr wrap="none" lIns="0" tIns="99235" rIns="59541" bIns="0" rtlCol="0" anchor="t"/>
+          <a:bodyPr wrap="none" lIns="99235" tIns="0" rIns="59541" bIns="0" rtlCol="0" anchor="t"/>
           <a:lstStyle/>
           <a:p>
             <a:pPr algn="l" indent="0" marL="0">
@@ -2283,7 +2275,7 @@
         </p:nvSpPr>
         <p:spPr>
           <a:xfrm>
-            <a:off x="661475" y="1661517"/>
+            <a:off x="661475" y="2103636"/>
             <a:ext cx="10868745" cy="590649"/>
           </a:xfrm>
           <a:prstGeom prst="rect">
@@ -2317,52 +2309,57 @@
           </a:p>
         </p:txBody>
       </p:sp>
-      <p:sp>
-        <p:nvSpPr>
-          <p:cNvPr id="3" name="Shape 1"/>
-          <p:cNvSpPr/>
-          <p:nvPr/>
-        </p:nvSpPr>
-        <p:spPr>
-          <a:xfrm>
-            <a:off x="661475" y="2630190"/>
-            <a:ext cx="5339820" cy="1127224"/>
-          </a:xfrm>
-          <a:prstGeom prst="roundRect">
-            <a:avLst>
-              <a:gd name="adj" fmla="val 7043"/>
-            </a:avLst>
-          </a:prstGeom>
-          <a:solidFill>
-            <a:srgbClr val="D1E5FA"/>
-          </a:solidFill>
-          <a:ln w="19050">
-            <a:solidFill>
-              <a:srgbClr val="B7CBE0"/>
-            </a:solidFill>
-            <a:prstDash val="solid"/>
-          </a:ln>
-        </p:spPr>
-      </p:sp>
-      <p:sp>
-        <p:nvSpPr>
-          <p:cNvPr id="4" name="Text 2"/>
-          <p:cNvSpPr/>
-          <p:nvPr/>
-        </p:nvSpPr>
-        <p:spPr>
-          <a:xfrm>
-            <a:off x="869531" y="2838252"/>
-            <a:ext cx="4923707" cy="295275"/>
-          </a:xfrm>
-          <a:prstGeom prst="rect">
-            <a:avLst/>
-          </a:prstGeom>
-          <a:noFill/>
-          <a:ln/>
-        </p:spPr>
-        <p:txBody>
-          <a:bodyPr wrap="none" lIns="0" tIns="0" rIns="0" bIns="0" rtlCol="0" anchor="t"/>
+      <p:pic>
+        <p:nvPicPr>
+          <p:cNvPr id="3" name="Image 0" descr="preencoded.png">    </p:cNvPr>
+          <p:cNvPicPr>
+            <a:picLocks noChangeAspect="1"/>
+          </p:cNvPicPr>
+          <p:nvPr/>
+        </p:nvPicPr>
+        <p:blipFill>
+          <a:blip r:embed="rId1">
+            <a:extLst>
+              <a:ext uri="{96DAC541-7B7A-43D3-8B79-37D633B846F1}">
+                <asvg:svgBlip xmlns:asvg="http://schemas.microsoft.com/office/drawing/2016/SVG/main" r:embed="rId2"/>
+              </a:ext>
+            </a:extLst>
+          </a:blip>
+          <a:stretch>
+            <a:fillRect/>
+          </a:stretch>
+        </p:blipFill>
+        <p:spPr>
+          <a:xfrm>
+            <a:off x="732315" y="3078163"/>
+            <a:ext cx="283461" cy="283468"/>
+          </a:xfrm>
+          <a:prstGeom prst="rect">
+            <a:avLst/>
+          </a:prstGeom>
+        </p:spPr>
+      </p:pic>
+      <p:sp>
+        <p:nvSpPr>
+          <p:cNvPr id="4" name="Text 1"/>
+          <p:cNvSpPr/>
+          <p:nvPr/>
+        </p:nvSpPr>
+        <p:spPr>
+          <a:xfrm>
+            <a:off x="1275723" y="3072309"/>
+            <a:ext cx="4701958" cy="590550"/>
+          </a:xfrm>
+          <a:prstGeom prst="rect">
+            <a:avLst/>
+          </a:prstGeom>
+          <a:noFill/>
+          <a:ln/>
+        </p:spPr>
+        <p:txBody>
+          <a:bodyPr wrap="square" lIns="0" tIns="0" rIns="0" bIns="0" rtlCol="0" anchor="t">
+            <a:normAutofit/>
+          </a:bodyPr>
           <a:lstStyle/>
           <a:p>
             <a:pPr algn="l" indent="0" marL="0">
@@ -2380,100 +2377,63 @@
                 <a:ea typeface="Orbitron Bold" pitchFamily="34" charset="-122"/>
                 <a:cs typeface="Orbitron Bold" pitchFamily="34" charset="-120"/>
               </a:rPr>
-              <a:t>Log it</a:t>
+              <a:t>Log what you used and what you changed</a:t>
             </a:r>
             <a:endParaRPr lang="en-US" sz="1850" dirty="0"/>
           </a:p>
         </p:txBody>
       </p:sp>
-      <p:sp>
-        <p:nvSpPr>
-          <p:cNvPr id="5" name="Text 3"/>
-          <p:cNvSpPr/>
-          <p:nvPr/>
-        </p:nvSpPr>
-        <p:spPr>
-          <a:xfrm>
-            <a:off x="869531" y="3246934"/>
-            <a:ext cx="4923707" cy="302419"/>
-          </a:xfrm>
-          <a:prstGeom prst="rect">
-            <a:avLst/>
-          </a:prstGeom>
-          <a:noFill/>
-          <a:ln/>
-        </p:spPr>
-        <p:txBody>
-          <a:bodyPr wrap="none" lIns="0" tIns="0" rIns="0" bIns="0" rtlCol="0" anchor="t"/>
-          <a:lstStyle/>
-          <a:p>
-            <a:pPr algn="l" indent="0" marL="0">
-              <a:lnSpc>
-                <a:spcPct val="133000"/>
-              </a:lnSpc>
-              <a:buNone/>
-            </a:pPr>
-            <a:r>
-              <a:rPr lang="en-US" sz="1450" dirty="0">
-                <a:solidFill>
-                  <a:srgbClr val="1C1C1C"/>
-                </a:solidFill>
-                <a:latin typeface="Roboto Condensed" pitchFamily="34" charset="0"/>
-                <a:ea typeface="Roboto Condensed" pitchFamily="34" charset="-122"/>
-                <a:cs typeface="Roboto Condensed" pitchFamily="34" charset="-120"/>
-              </a:rPr>
-              <a:t>Log what you used and what you changed</a:t>
-            </a:r>
-            <a:endParaRPr lang="en-US" sz="1450" dirty="0"/>
-          </a:p>
-        </p:txBody>
-      </p:sp>
-      <p:sp>
-        <p:nvSpPr>
-          <p:cNvPr id="6" name="Shape 4"/>
-          <p:cNvSpPr/>
-          <p:nvPr/>
-        </p:nvSpPr>
-        <p:spPr>
-          <a:xfrm>
-            <a:off x="6190301" y="2630190"/>
-            <a:ext cx="5339919" cy="1127224"/>
-          </a:xfrm>
-          <a:prstGeom prst="roundRect">
-            <a:avLst>
-              <a:gd name="adj" fmla="val 7043"/>
-            </a:avLst>
-          </a:prstGeom>
-          <a:solidFill>
-            <a:srgbClr val="D1E5FA"/>
-          </a:solidFill>
-          <a:ln w="19050">
-            <a:solidFill>
-              <a:srgbClr val="B7CBE0"/>
-            </a:solidFill>
-            <a:prstDash val="solid"/>
-          </a:ln>
-        </p:spPr>
-      </p:sp>
-      <p:sp>
-        <p:nvSpPr>
-          <p:cNvPr id="7" name="Text 5"/>
-          <p:cNvSpPr/>
-          <p:nvPr/>
-        </p:nvSpPr>
-        <p:spPr>
-          <a:xfrm>
-            <a:off x="6398358" y="2838252"/>
-            <a:ext cx="4923806" cy="295275"/>
-          </a:xfrm>
-          <a:prstGeom prst="rect">
-            <a:avLst/>
-          </a:prstGeom>
-          <a:noFill/>
-          <a:ln/>
-        </p:spPr>
-        <p:txBody>
-          <a:bodyPr wrap="none" lIns="0" tIns="0" rIns="0" bIns="0" rtlCol="0" anchor="t"/>
+      <p:pic>
+        <p:nvPicPr>
+          <p:cNvPr id="5" name="Image 1" descr="preencoded.png">    </p:cNvPr>
+          <p:cNvPicPr>
+            <a:picLocks noChangeAspect="1"/>
+          </p:cNvPicPr>
+          <p:nvPr/>
+        </p:nvPicPr>
+        <p:blipFill>
+          <a:blip r:embed="rId3">
+            <a:extLst>
+              <a:ext uri="{96DAC541-7B7A-43D3-8B79-37D633B846F1}">
+                <asvg:svgBlip xmlns:asvg="http://schemas.microsoft.com/office/drawing/2016/SVG/main" r:embed="rId4"/>
+              </a:ext>
+            </a:extLst>
+          </a:blip>
+          <a:stretch>
+            <a:fillRect/>
+          </a:stretch>
+        </p:blipFill>
+        <p:spPr>
+          <a:xfrm>
+            <a:off x="6284755" y="3078163"/>
+            <a:ext cx="283461" cy="283468"/>
+          </a:xfrm>
+          <a:prstGeom prst="rect">
+            <a:avLst/>
+          </a:prstGeom>
+        </p:spPr>
+      </p:pic>
+      <p:sp>
+        <p:nvSpPr>
+          <p:cNvPr id="6" name="Text 2"/>
+          <p:cNvSpPr/>
+          <p:nvPr/>
+        </p:nvSpPr>
+        <p:spPr>
+          <a:xfrm>
+            <a:off x="6828163" y="3072309"/>
+            <a:ext cx="4702057" cy="590550"/>
+          </a:xfrm>
+          <a:prstGeom prst="rect">
+            <a:avLst/>
+          </a:prstGeom>
+          <a:noFill/>
+          <a:ln/>
+        </p:spPr>
+        <p:txBody>
+          <a:bodyPr wrap="square" lIns="0" tIns="0" rIns="0" bIns="0" rtlCol="0" anchor="t">
+            <a:normAutofit/>
+          </a:bodyPr>
           <a:lstStyle/>
           <a:p>
             <a:pPr algn="l" indent="0" marL="0">
@@ -2491,91 +2451,52 @@
                 <a:ea typeface="Orbitron Bold" pitchFamily="34" charset="-122"/>
                 <a:cs typeface="Orbitron Bold" pitchFamily="34" charset="-120"/>
               </a:rPr>
-              <a:t>Explain it</a:t>
+              <a:t>Be able to explain every line you submit</a:t>
             </a:r>
             <a:endParaRPr lang="en-US" sz="1850" dirty="0"/>
           </a:p>
         </p:txBody>
       </p:sp>
-      <p:sp>
-        <p:nvSpPr>
-          <p:cNvPr id="8" name="Text 6"/>
-          <p:cNvSpPr/>
-          <p:nvPr/>
-        </p:nvSpPr>
-        <p:spPr>
-          <a:xfrm>
-            <a:off x="6398358" y="3246934"/>
-            <a:ext cx="4923806" cy="302419"/>
-          </a:xfrm>
-          <a:prstGeom prst="rect">
-            <a:avLst/>
-          </a:prstGeom>
-          <a:noFill/>
-          <a:ln/>
-        </p:spPr>
-        <p:txBody>
-          <a:bodyPr wrap="none" lIns="0" tIns="0" rIns="0" bIns="0" rtlCol="0" anchor="t"/>
-          <a:lstStyle/>
-          <a:p>
-            <a:pPr algn="l" indent="0" marL="0">
-              <a:lnSpc>
-                <a:spcPct val="133000"/>
-              </a:lnSpc>
-              <a:buNone/>
-            </a:pPr>
-            <a:r>
-              <a:rPr lang="en-US" sz="1450" dirty="0">
-                <a:solidFill>
-                  <a:srgbClr val="1C1C1C"/>
-                </a:solidFill>
-                <a:latin typeface="Roboto Condensed" pitchFamily="34" charset="0"/>
-                <a:ea typeface="Roboto Condensed" pitchFamily="34" charset="-122"/>
-                <a:cs typeface="Roboto Condensed" pitchFamily="34" charset="-120"/>
-              </a:rPr>
-              <a:t>Be able to explain every line you submit</a:t>
-            </a:r>
-            <a:endParaRPr lang="en-US" sz="1450" dirty="0"/>
-          </a:p>
-        </p:txBody>
-      </p:sp>
-      <p:sp>
-        <p:nvSpPr>
-          <p:cNvPr id="9" name="Shape 7"/>
-          <p:cNvSpPr/>
-          <p:nvPr/>
-        </p:nvSpPr>
-        <p:spPr>
-          <a:xfrm>
-            <a:off x="661475" y="3946426"/>
-            <a:ext cx="5339820" cy="1127224"/>
-          </a:xfrm>
-          <a:prstGeom prst="roundRect">
-            <a:avLst>
-              <a:gd name="adj" fmla="val 7043"/>
-            </a:avLst>
-          </a:prstGeom>
-          <a:solidFill>
-            <a:srgbClr val="D1E5FA"/>
-          </a:solidFill>
-          <a:ln w="19050">
-            <a:solidFill>
-              <a:srgbClr val="B7CBE0"/>
-            </a:solidFill>
-            <a:prstDash val="solid"/>
-          </a:ln>
-        </p:spPr>
-      </p:sp>
-      <p:sp>
-        <p:nvSpPr>
-          <p:cNvPr id="10" name="Text 8"/>
-          <p:cNvSpPr/>
-          <p:nvPr/>
-        </p:nvSpPr>
-        <p:spPr>
-          <a:xfrm>
-            <a:off x="869531" y="4154488"/>
-            <a:ext cx="4923707" cy="295275"/>
+      <p:pic>
+        <p:nvPicPr>
+          <p:cNvPr id="7" name="Image 2" descr="preencoded.png">    </p:cNvPr>
+          <p:cNvPicPr>
+            <a:picLocks noChangeAspect="1"/>
+          </p:cNvPicPr>
+          <p:nvPr/>
+        </p:nvPicPr>
+        <p:blipFill>
+          <a:blip r:embed="rId5">
+            <a:extLst>
+              <a:ext uri="{96DAC541-7B7A-43D3-8B79-37D633B846F1}">
+                <asvg:svgBlip xmlns:asvg="http://schemas.microsoft.com/office/drawing/2016/SVG/main" r:embed="rId6"/>
+              </a:ext>
+            </a:extLst>
+          </a:blip>
+          <a:stretch>
+            <a:fillRect/>
+          </a:stretch>
+        </p:blipFill>
+        <p:spPr>
+          <a:xfrm>
+            <a:off x="732315" y="4046736"/>
+            <a:ext cx="283461" cy="283468"/>
+          </a:xfrm>
+          <a:prstGeom prst="rect">
+            <a:avLst/>
+          </a:prstGeom>
+        </p:spPr>
+      </p:pic>
+      <p:sp>
+        <p:nvSpPr>
+          <p:cNvPr id="8" name="Text 3"/>
+          <p:cNvSpPr/>
+          <p:nvPr/>
+        </p:nvSpPr>
+        <p:spPr>
+          <a:xfrm>
+            <a:off x="1275723" y="4040882"/>
+            <a:ext cx="4701958" cy="295275"/>
           </a:xfrm>
           <a:prstGeom prst="rect">
             <a:avLst/>
@@ -2602,100 +2523,63 @@
                 <a:ea typeface="Orbitron Bold" pitchFamily="34" charset="-122"/>
                 <a:cs typeface="Orbitron Bold" pitchFamily="34" charset="-120"/>
               </a:rPr>
-              <a:t>Protect data</a:t>
+              <a:t>No personal data in any tool, ever</a:t>
             </a:r>
             <a:endParaRPr lang="en-US" sz="1850" dirty="0"/>
           </a:p>
         </p:txBody>
       </p:sp>
-      <p:sp>
-        <p:nvSpPr>
-          <p:cNvPr id="11" name="Text 9"/>
-          <p:cNvSpPr/>
-          <p:nvPr/>
-        </p:nvSpPr>
-        <p:spPr>
-          <a:xfrm>
-            <a:off x="869531" y="4563170"/>
-            <a:ext cx="4923707" cy="302419"/>
-          </a:xfrm>
-          <a:prstGeom prst="rect">
-            <a:avLst/>
-          </a:prstGeom>
-          <a:noFill/>
-          <a:ln/>
-        </p:spPr>
-        <p:txBody>
-          <a:bodyPr wrap="none" lIns="0" tIns="0" rIns="0" bIns="0" rtlCol="0" anchor="t"/>
-          <a:lstStyle/>
-          <a:p>
-            <a:pPr algn="l" indent="0" marL="0">
-              <a:lnSpc>
-                <a:spcPct val="133000"/>
-              </a:lnSpc>
-              <a:buNone/>
-            </a:pPr>
-            <a:r>
-              <a:rPr lang="en-US" sz="1450" dirty="0">
-                <a:solidFill>
-                  <a:srgbClr val="1C1C1C"/>
-                </a:solidFill>
-                <a:latin typeface="Roboto Condensed" pitchFamily="34" charset="0"/>
-                <a:ea typeface="Roboto Condensed" pitchFamily="34" charset="-122"/>
-                <a:cs typeface="Roboto Condensed" pitchFamily="34" charset="-120"/>
-              </a:rPr>
-              <a:t>No personal data in any tool, ever</a:t>
-            </a:r>
-            <a:endParaRPr lang="en-US" sz="1450" dirty="0"/>
-          </a:p>
-        </p:txBody>
-      </p:sp>
-      <p:sp>
-        <p:nvSpPr>
-          <p:cNvPr id="12" name="Shape 10"/>
-          <p:cNvSpPr/>
-          <p:nvPr/>
-        </p:nvSpPr>
-        <p:spPr>
-          <a:xfrm>
-            <a:off x="6190301" y="3946426"/>
-            <a:ext cx="5339919" cy="1127224"/>
-          </a:xfrm>
-          <a:prstGeom prst="roundRect">
-            <a:avLst>
-              <a:gd name="adj" fmla="val 7043"/>
-            </a:avLst>
-          </a:prstGeom>
-          <a:solidFill>
-            <a:srgbClr val="D1E5FA"/>
-          </a:solidFill>
-          <a:ln w="19050">
-            <a:solidFill>
-              <a:srgbClr val="B7CBE0"/>
-            </a:solidFill>
-            <a:prstDash val="solid"/>
-          </a:ln>
-        </p:spPr>
-      </p:sp>
-      <p:sp>
-        <p:nvSpPr>
-          <p:cNvPr id="13" name="Text 11"/>
-          <p:cNvSpPr/>
-          <p:nvPr/>
-        </p:nvSpPr>
-        <p:spPr>
-          <a:xfrm>
-            <a:off x="6398358" y="4154488"/>
-            <a:ext cx="4923806" cy="295275"/>
-          </a:xfrm>
-          <a:prstGeom prst="rect">
-            <a:avLst/>
-          </a:prstGeom>
-          <a:noFill/>
-          <a:ln/>
-        </p:spPr>
-        <p:txBody>
-          <a:bodyPr wrap="none" lIns="0" tIns="0" rIns="0" bIns="0" rtlCol="0" anchor="t"/>
+      <p:pic>
+        <p:nvPicPr>
+          <p:cNvPr id="9" name="Image 3" descr="preencoded.png">    </p:cNvPr>
+          <p:cNvPicPr>
+            <a:picLocks noChangeAspect="1"/>
+          </p:cNvPicPr>
+          <p:nvPr/>
+        </p:nvPicPr>
+        <p:blipFill>
+          <a:blip r:embed="rId7">
+            <a:extLst>
+              <a:ext uri="{96DAC541-7B7A-43D3-8B79-37D633B846F1}">
+                <asvg:svgBlip xmlns:asvg="http://schemas.microsoft.com/office/drawing/2016/SVG/main" r:embed="rId8"/>
+              </a:ext>
+            </a:extLst>
+          </a:blip>
+          <a:stretch>
+            <a:fillRect/>
+          </a:stretch>
+        </p:blipFill>
+        <p:spPr>
+          <a:xfrm>
+            <a:off x="6284755" y="4046736"/>
+            <a:ext cx="283461" cy="283468"/>
+          </a:xfrm>
+          <a:prstGeom prst="rect">
+            <a:avLst/>
+          </a:prstGeom>
+        </p:spPr>
+      </p:pic>
+      <p:sp>
+        <p:nvSpPr>
+          <p:cNvPr id="10" name="Text 4"/>
+          <p:cNvSpPr/>
+          <p:nvPr/>
+        </p:nvSpPr>
+        <p:spPr>
+          <a:xfrm>
+            <a:off x="6828163" y="4040882"/>
+            <a:ext cx="4702057" cy="590550"/>
+          </a:xfrm>
+          <a:prstGeom prst="rect">
+            <a:avLst/>
+          </a:prstGeom>
+          <a:noFill/>
+          <a:ln/>
+        </p:spPr>
+        <p:txBody>
+          <a:bodyPr wrap="square" lIns="0" tIns="0" rIns="0" bIns="0" rtlCol="0" anchor="t">
+            <a:normAutofit/>
+          </a:bodyPr>
           <a:lstStyle/>
           <a:p>
             <a:pPr algn="l" indent="0" marL="0">
@@ -2713,7 +2597,7 @@
                 <a:ea typeface="Orbitron Bold" pitchFamily="34" charset="-122"/>
                 <a:cs typeface="Orbitron Bold" pitchFamily="34" charset="-120"/>
               </a:rPr>
-              <a:t>These hold</a:t>
+              <a:t>These hold whatever the law decides</a:t>
             </a:r>
             <a:endParaRPr lang="en-US" sz="1850" dirty="0"/>
           </a:p>
@@ -2721,49 +2605,7 @@
       </p:sp>
       <p:sp>
         <p:nvSpPr>
-          <p:cNvPr id="14" name="Text 12"/>
-          <p:cNvSpPr/>
-          <p:nvPr/>
-        </p:nvSpPr>
-        <p:spPr>
-          <a:xfrm>
-            <a:off x="6398358" y="4563170"/>
-            <a:ext cx="4923806" cy="302419"/>
-          </a:xfrm>
-          <a:prstGeom prst="rect">
-            <a:avLst/>
-          </a:prstGeom>
-          <a:noFill/>
-          <a:ln/>
-        </p:spPr>
-        <p:txBody>
-          <a:bodyPr wrap="none" lIns="0" tIns="0" rIns="0" bIns="0" rtlCol="0" anchor="t"/>
-          <a:lstStyle/>
-          <a:p>
-            <a:pPr algn="l" indent="0" marL="0">
-              <a:lnSpc>
-                <a:spcPct val="133000"/>
-              </a:lnSpc>
-              <a:buNone/>
-            </a:pPr>
-            <a:r>
-              <a:rPr lang="en-US" sz="1450" dirty="0">
-                <a:solidFill>
-                  <a:srgbClr val="1C1C1C"/>
-                </a:solidFill>
-                <a:latin typeface="Roboto Condensed" pitchFamily="34" charset="0"/>
-                <a:ea typeface="Roboto Condensed" pitchFamily="34" charset="-122"/>
-                <a:cs typeface="Roboto Condensed" pitchFamily="34" charset="-120"/>
-              </a:rPr>
-              <a:t>These hold whatever the law decides</a:t>
-            </a:r>
-            <a:endParaRPr lang="en-US" sz="1450" dirty="0"/>
-          </a:p>
-        </p:txBody>
-      </p:sp>
-      <p:sp>
-        <p:nvSpPr>
-          <p:cNvPr id="15" name="Text 13"/>
+          <p:cNvPr id="11" name="Text 5"/>
           <p:cNvSpPr/>
           <p:nvPr/>
         </p:nvSpPr>
@@ -2779,7 +2621,7 @@
           <a:ln/>
         </p:spPr>
         <p:txBody>
-          <a:bodyPr wrap="none" lIns="0" tIns="99235" rIns="59541" bIns="0" rtlCol="0" anchor="t"/>
+          <a:bodyPr wrap="none" lIns="99235" tIns="0" rIns="59541" bIns="0" rtlCol="0" anchor="t"/>
           <a:lstStyle/>
           <a:p>
             <a:pPr algn="l" indent="0" marL="0">
@@ -2828,51 +2670,25 @@
           <a:chExt cx="0" cy="0"/>
         </a:xfrm>
       </p:grpSpPr>
-      <p:pic>
-        <p:nvPicPr>
-          <p:cNvPr id="2" name="Image 0" descr="preencoded.png">    </p:cNvPr>
-          <p:cNvPicPr>
-            <a:picLocks noChangeAspect="1"/>
-          </p:cNvPicPr>
-          <p:nvPr/>
-        </p:nvPicPr>
-        <p:blipFill>
-          <a:blip r:embed="rId1"/>
-          <a:stretch>
-            <a:fillRect/>
-          </a:stretch>
-        </p:blipFill>
-        <p:spPr>
-          <a:xfrm>
-            <a:off x="7619809" y="0"/>
-            <a:ext cx="4571886" cy="6858000"/>
-          </a:xfrm>
-          <a:prstGeom prst="rect">
-            <a:avLst/>
-          </a:prstGeom>
-        </p:spPr>
-      </p:pic>
-      <p:sp>
-        <p:nvSpPr>
-          <p:cNvPr id="3" name="Text 0"/>
-          <p:cNvSpPr/>
-          <p:nvPr/>
-        </p:nvSpPr>
-        <p:spPr>
-          <a:xfrm>
-            <a:off x="661475" y="1931194"/>
-            <a:ext cx="6296860" cy="1181298"/>
-          </a:xfrm>
-          <a:prstGeom prst="rect">
-            <a:avLst/>
-          </a:prstGeom>
-          <a:noFill/>
-          <a:ln/>
-        </p:spPr>
-        <p:txBody>
-          <a:bodyPr wrap="square" lIns="0" tIns="0" rIns="0" bIns="0" rtlCol="0" anchor="t">
-            <a:normAutofit/>
-          </a:bodyPr>
+      <p:sp>
+        <p:nvSpPr>
+          <p:cNvPr id="2" name="Text 0"/>
+          <p:cNvSpPr/>
+          <p:nvPr/>
+        </p:nvSpPr>
+        <p:spPr>
+          <a:xfrm>
+            <a:off x="661475" y="1702693"/>
+            <a:ext cx="10868745" cy="590649"/>
+          </a:xfrm>
+          <a:prstGeom prst="rect">
+            <a:avLst/>
+          </a:prstGeom>
+          <a:noFill/>
+          <a:ln/>
+        </p:spPr>
+        <p:txBody>
+          <a:bodyPr wrap="none" lIns="0" tIns="0" rIns="0" bIns="0" rtlCol="0" anchor="t"/>
           <a:lstStyle/>
           <a:p>
             <a:pPr algn="l" indent="0" marL="0">
@@ -2898,33 +2714,134 @@
       </p:sp>
       <p:sp>
         <p:nvSpPr>
-          <p:cNvPr id="4" name="Text 1"/>
-          <p:cNvSpPr/>
-          <p:nvPr/>
-        </p:nvSpPr>
-        <p:spPr>
-          <a:xfrm>
-            <a:off x="661475" y="3395960"/>
-            <a:ext cx="6296860" cy="1407914"/>
-          </a:xfrm>
-          <a:prstGeom prst="rect">
-            <a:avLst/>
-          </a:prstGeom>
-          <a:noFill/>
-          <a:ln/>
-        </p:spPr>
-        <p:txBody>
-          <a:bodyPr wrap="square" lIns="0" tIns="75608" rIns="0" bIns="0" rtlCol="0" anchor="t">
-            <a:normAutofit/>
-          </a:bodyPr>
-          <a:lstStyle/>
-          <a:p>
-            <a:pPr algn="l" marL="294640" indent="-294640">
+          <p:cNvPr id="3" name="Text 1"/>
+          <p:cNvSpPr/>
+          <p:nvPr/>
+        </p:nvSpPr>
+        <p:spPr>
+          <a:xfrm>
+            <a:off x="661475" y="2671366"/>
+            <a:ext cx="378014" cy="236240"/>
+          </a:xfrm>
+          <a:prstGeom prst="rect">
+            <a:avLst/>
+          </a:prstGeom>
+          <a:noFill/>
+          <a:ln/>
+        </p:spPr>
+        <p:txBody>
+          <a:bodyPr wrap="none" lIns="0" tIns="0" rIns="0" bIns="0" rtlCol="0" anchor="ctr"/>
+          <a:lstStyle/>
+          <a:p>
+            <a:pPr algn="l" indent="0" marL="0">
+              <a:lnSpc>
+                <a:spcPct val="100000"/>
+              </a:lnSpc>
+              <a:buNone/>
+            </a:pPr>
+            <a:r>
+              <a:rPr lang="en-US" sz="1450" dirty="0">
+                <a:solidFill>
+                  <a:srgbClr val="1C1C1C"/>
+                </a:solidFill>
+                <a:latin typeface="Orbitron" pitchFamily="34" charset="0"/>
+                <a:ea typeface="Orbitron" pitchFamily="34" charset="-122"/>
+                <a:cs typeface="Orbitron" pitchFamily="34" charset="-120"/>
+              </a:rPr>
+              <a:t>01</a:t>
+            </a:r>
+            <a:endParaRPr lang="en-US" sz="1450" dirty="0"/>
+          </a:p>
+        </p:txBody>
+      </p:sp>
+      <p:sp>
+        <p:nvSpPr>
+          <p:cNvPr id="4" name="Shape 2"/>
+          <p:cNvSpPr/>
+          <p:nvPr/>
+        </p:nvSpPr>
+        <p:spPr>
+          <a:xfrm>
+            <a:off x="661475" y="2967236"/>
+            <a:ext cx="5339820" cy="25400"/>
+          </a:xfrm>
+          <a:prstGeom prst="rect">
+            <a:avLst/>
+          </a:prstGeom>
+          <a:solidFill>
+            <a:srgbClr val="57A1EB"/>
+          </a:solidFill>
+          <a:ln/>
+        </p:spPr>
+      </p:sp>
+      <p:sp>
+        <p:nvSpPr>
+          <p:cNvPr id="5" name="Text 3"/>
+          <p:cNvSpPr/>
+          <p:nvPr/>
+        </p:nvSpPr>
+        <p:spPr>
+          <a:xfrm>
+            <a:off x="661475" y="3112492"/>
+            <a:ext cx="5339820" cy="295275"/>
+          </a:xfrm>
+          <a:prstGeom prst="rect">
+            <a:avLst/>
+          </a:prstGeom>
+          <a:noFill/>
+          <a:ln/>
+        </p:spPr>
+        <p:txBody>
+          <a:bodyPr wrap="none" lIns="0" tIns="0" rIns="0" bIns="0" rtlCol="0" anchor="t"/>
+          <a:lstStyle/>
+          <a:p>
+            <a:pPr algn="l" indent="0" marL="0">
+              <a:lnSpc>
+                <a:spcPct val="104000"/>
+              </a:lnSpc>
+              <a:buNone/>
+            </a:pPr>
+            <a:r>
+              <a:rPr lang="en-US" sz="1850" b="1" dirty="0">
+                <a:solidFill>
+                  <a:srgbClr val="1C1C1C"/>
+                </a:solidFill>
+                <a:latin typeface="Orbitron Bold" pitchFamily="34" charset="0"/>
+                <a:ea typeface="Orbitron Bold" pitchFamily="34" charset="-122"/>
+                <a:cs typeface="Orbitron Bold" pitchFamily="34" charset="-120"/>
+              </a:rPr>
+              <a:t>Quote the ownership clause</a:t>
+            </a:r>
+            <a:endParaRPr lang="en-US" sz="1850" dirty="0"/>
+          </a:p>
+        </p:txBody>
+      </p:sp>
+      <p:sp>
+        <p:nvSpPr>
+          <p:cNvPr id="6" name="Text 4"/>
+          <p:cNvSpPr/>
+          <p:nvPr/>
+        </p:nvSpPr>
+        <p:spPr>
+          <a:xfrm>
+            <a:off x="661475" y="3521174"/>
+            <a:ext cx="5339820" cy="302419"/>
+          </a:xfrm>
+          <a:prstGeom prst="rect">
+            <a:avLst/>
+          </a:prstGeom>
+          <a:noFill/>
+          <a:ln/>
+        </p:spPr>
+        <p:txBody>
+          <a:bodyPr wrap="none" lIns="0" tIns="0" rIns="0" bIns="0" rtlCol="0" anchor="t"/>
+          <a:lstStyle/>
+          <a:p>
+            <a:pPr algn="l" indent="0" marL="0">
               <a:lnSpc>
                 <a:spcPct val="133000"/>
               </a:lnSpc>
-              <a:buSzPct val="100000"/>
-              <a:buChar char="•"/>
+              <a:buNone/>
             </a:pPr>
             <a:r>
               <a:rPr lang="en-US" sz="1450" dirty="0">
@@ -2935,17 +2852,142 @@
                 <a:ea typeface="Roboto Condensed" pitchFamily="34" charset="-122"/>
                 <a:cs typeface="Roboto Condensed" pitchFamily="34" charset="-120"/>
               </a:rPr>
-              <a:t>Quote the ownership clause from the actual terms</a:t>
+              <a:t>From the actual terms of the tool</a:t>
             </a:r>
             <a:endParaRPr lang="en-US" sz="1450" dirty="0"/>
           </a:p>
-          <a:p>
-            <a:pPr algn="l" marL="294640" indent="-294640">
+        </p:txBody>
+      </p:sp>
+      <p:sp>
+        <p:nvSpPr>
+          <p:cNvPr id="7" name="Text 5"/>
+          <p:cNvSpPr/>
+          <p:nvPr/>
+        </p:nvSpPr>
+        <p:spPr>
+          <a:xfrm>
+            <a:off x="6190301" y="2671366"/>
+            <a:ext cx="378014" cy="236240"/>
+          </a:xfrm>
+          <a:prstGeom prst="rect">
+            <a:avLst/>
+          </a:prstGeom>
+          <a:noFill/>
+          <a:ln/>
+        </p:spPr>
+        <p:txBody>
+          <a:bodyPr wrap="none" lIns="0" tIns="0" rIns="0" bIns="0" rtlCol="0" anchor="ctr"/>
+          <a:lstStyle/>
+          <a:p>
+            <a:pPr algn="l" indent="0" marL="0">
+              <a:lnSpc>
+                <a:spcPct val="100000"/>
+              </a:lnSpc>
+              <a:buNone/>
+            </a:pPr>
+            <a:r>
+              <a:rPr lang="en-US" sz="1450" dirty="0">
+                <a:solidFill>
+                  <a:srgbClr val="1C1C1C"/>
+                </a:solidFill>
+                <a:latin typeface="Orbitron" pitchFamily="34" charset="0"/>
+                <a:ea typeface="Orbitron" pitchFamily="34" charset="-122"/>
+                <a:cs typeface="Orbitron" pitchFamily="34" charset="-120"/>
+              </a:rPr>
+              <a:t>02</a:t>
+            </a:r>
+            <a:endParaRPr lang="en-US" sz="1450" dirty="0"/>
+          </a:p>
+        </p:txBody>
+      </p:sp>
+      <p:sp>
+        <p:nvSpPr>
+          <p:cNvPr id="8" name="Shape 6"/>
+          <p:cNvSpPr/>
+          <p:nvPr/>
+        </p:nvSpPr>
+        <p:spPr>
+          <a:xfrm>
+            <a:off x="6190301" y="2967236"/>
+            <a:ext cx="5339919" cy="25400"/>
+          </a:xfrm>
+          <a:prstGeom prst="rect">
+            <a:avLst/>
+          </a:prstGeom>
+          <a:solidFill>
+            <a:srgbClr val="57A1EB"/>
+          </a:solidFill>
+          <a:ln/>
+        </p:spPr>
+      </p:sp>
+      <p:sp>
+        <p:nvSpPr>
+          <p:cNvPr id="9" name="Text 7"/>
+          <p:cNvSpPr/>
+          <p:nvPr/>
+        </p:nvSpPr>
+        <p:spPr>
+          <a:xfrm>
+            <a:off x="6190301" y="3112492"/>
+            <a:ext cx="5339919" cy="295275"/>
+          </a:xfrm>
+          <a:prstGeom prst="rect">
+            <a:avLst/>
+          </a:prstGeom>
+          <a:noFill/>
+          <a:ln/>
+        </p:spPr>
+        <p:txBody>
+          <a:bodyPr wrap="none" lIns="0" tIns="0" rIns="0" bIns="0" rtlCol="0" anchor="t"/>
+          <a:lstStyle/>
+          <a:p>
+            <a:pPr algn="l" indent="0" marL="0">
+              <a:lnSpc>
+                <a:spcPct val="104000"/>
+              </a:lnSpc>
+              <a:buNone/>
+            </a:pPr>
+            <a:r>
+              <a:rPr lang="en-US" sz="1850" b="1" dirty="0">
+                <a:solidFill>
+                  <a:srgbClr val="1C1C1C"/>
+                </a:solidFill>
+                <a:latin typeface="Orbitron Bold" pitchFamily="34" charset="0"/>
+                <a:ea typeface="Orbitron Bold" pitchFamily="34" charset="-122"/>
+                <a:cs typeface="Orbitron Bold" pitchFamily="34" charset="-120"/>
+              </a:rPr>
+              <a:t>One sentence each</a:t>
+            </a:r>
+            <a:endParaRPr lang="en-US" sz="1850" dirty="0"/>
+          </a:p>
+        </p:txBody>
+      </p:sp>
+      <p:sp>
+        <p:nvSpPr>
+          <p:cNvPr id="10" name="Text 8"/>
+          <p:cNvSpPr/>
+          <p:nvPr/>
+        </p:nvSpPr>
+        <p:spPr>
+          <a:xfrm>
+            <a:off x="6190301" y="3521174"/>
+            <a:ext cx="5339919" cy="302419"/>
+          </a:xfrm>
+          <a:prstGeom prst="rect">
+            <a:avLst/>
+          </a:prstGeom>
+          <a:noFill/>
+          <a:ln/>
+        </p:spPr>
+        <p:txBody>
+          <a:bodyPr wrap="none" lIns="0" tIns="0" rIns="0" bIns="0" rtlCol="0" anchor="t"/>
+          <a:lstStyle/>
+          <a:p>
+            <a:pPr algn="l" indent="0" marL="0">
               <a:lnSpc>
                 <a:spcPct val="133000"/>
               </a:lnSpc>
-              <a:buSzPct val="100000"/>
-              <a:buChar char="•"/>
+              <a:buNone/>
             </a:pPr>
             <a:r>
               <a:rPr lang="en-US" sz="1450" dirty="0">
@@ -2956,57 +2998,223 @@
                 <a:ea typeface="Roboto Condensed" pitchFamily="34" charset="-122"/>
                 <a:cs typeface="Roboto Condensed" pitchFamily="34" charset="-120"/>
               </a:rPr>
-              <a:t>One sentence each on MIT, Apache, GPL</a:t>
+              <a:t>On MIT, Apache, GPL</a:t>
             </a:r>
             <a:endParaRPr lang="en-US" sz="1450" dirty="0"/>
           </a:p>
-          <a:p>
-            <a:pPr algn="l" marL="294640" indent="-294640">
-              <a:lnSpc>
-                <a:spcPct val="133000"/>
-              </a:lnSpc>
-              <a:buSzPct val="100000"/>
-              <a:buChar char="•"/>
+        </p:txBody>
+      </p:sp>
+      <p:sp>
+        <p:nvSpPr>
+          <p:cNvPr id="11" name="Text 9"/>
+          <p:cNvSpPr/>
+          <p:nvPr/>
+        </p:nvSpPr>
+        <p:spPr>
+          <a:xfrm>
+            <a:off x="661475" y="4154289"/>
+            <a:ext cx="378014" cy="236240"/>
+          </a:xfrm>
+          <a:prstGeom prst="rect">
+            <a:avLst/>
+          </a:prstGeom>
+          <a:noFill/>
+          <a:ln/>
+        </p:spPr>
+        <p:txBody>
+          <a:bodyPr wrap="none" lIns="0" tIns="0" rIns="0" bIns="0" rtlCol="0" anchor="ctr"/>
+          <a:lstStyle/>
+          <a:p>
+            <a:pPr algn="l" indent="0" marL="0">
+              <a:lnSpc>
+                <a:spcPct val="100000"/>
+              </a:lnSpc>
+              <a:buNone/>
             </a:pPr>
             <a:r>
               <a:rPr lang="en-US" sz="1450" dirty="0">
                 <a:solidFill>
                   <a:srgbClr val="1C1C1C"/>
                 </a:solidFill>
-                <a:latin typeface="Roboto Condensed" pitchFamily="34" charset="0"/>
-                <a:ea typeface="Roboto Condensed" pitchFamily="34" charset="-122"/>
-                <a:cs typeface="Roboto Condensed" pitchFamily="34" charset="-120"/>
+                <a:latin typeface="Orbitron" pitchFamily="34" charset="0"/>
+                <a:ea typeface="Orbitron" pitchFamily="34" charset="-122"/>
+                <a:cs typeface="Orbitron" pitchFamily="34" charset="-120"/>
+              </a:rPr>
+              <a:t>03</a:t>
+            </a:r>
+            <a:endParaRPr lang="en-US" sz="1450" dirty="0"/>
+          </a:p>
+        </p:txBody>
+      </p:sp>
+      <p:sp>
+        <p:nvSpPr>
+          <p:cNvPr id="12" name="Shape 10"/>
+          <p:cNvSpPr/>
+          <p:nvPr/>
+        </p:nvSpPr>
+        <p:spPr>
+          <a:xfrm>
+            <a:off x="661475" y="4450159"/>
+            <a:ext cx="5339820" cy="25400"/>
+          </a:xfrm>
+          <a:prstGeom prst="rect">
+            <a:avLst/>
+          </a:prstGeom>
+          <a:solidFill>
+            <a:srgbClr val="57A1EB"/>
+          </a:solidFill>
+          <a:ln/>
+        </p:spPr>
+      </p:sp>
+      <p:sp>
+        <p:nvSpPr>
+          <p:cNvPr id="13" name="Text 11"/>
+          <p:cNvSpPr/>
+          <p:nvPr/>
+        </p:nvSpPr>
+        <p:spPr>
+          <a:xfrm>
+            <a:off x="661475" y="4595416"/>
+            <a:ext cx="5339820" cy="295275"/>
+          </a:xfrm>
+          <a:prstGeom prst="rect">
+            <a:avLst/>
+          </a:prstGeom>
+          <a:noFill/>
+          <a:ln/>
+        </p:spPr>
+        <p:txBody>
+          <a:bodyPr wrap="none" lIns="0" tIns="0" rIns="0" bIns="0" rtlCol="0" anchor="t"/>
+          <a:lstStyle/>
+          <a:p>
+            <a:pPr algn="l" indent="0" marL="0">
+              <a:lnSpc>
+                <a:spcPct val="104000"/>
+              </a:lnSpc>
+              <a:buNone/>
+            </a:pPr>
+            <a:r>
+              <a:rPr lang="en-US" sz="1850" b="1" dirty="0">
+                <a:solidFill>
+                  <a:srgbClr val="1C1C1C"/>
+                </a:solidFill>
+                <a:latin typeface="Orbitron Bold" pitchFamily="34" charset="0"/>
+                <a:ea typeface="Orbitron Bold" pitchFamily="34" charset="-122"/>
+                <a:cs typeface="Orbitron Bold" pitchFamily="34" charset="-120"/>
               </a:rPr>
               <a:t>A 300 to 400 word position paper</a:t>
             </a:r>
+            <a:endParaRPr lang="en-US" sz="1850" dirty="0"/>
+          </a:p>
+        </p:txBody>
+      </p:sp>
+      <p:sp>
+        <p:nvSpPr>
+          <p:cNvPr id="14" name="Text 12"/>
+          <p:cNvSpPr/>
+          <p:nvPr/>
+        </p:nvSpPr>
+        <p:spPr>
+          <a:xfrm>
+            <a:off x="6190301" y="4154289"/>
+            <a:ext cx="378014" cy="236240"/>
+          </a:xfrm>
+          <a:prstGeom prst="rect">
+            <a:avLst/>
+          </a:prstGeom>
+          <a:noFill/>
+          <a:ln/>
+        </p:spPr>
+        <p:txBody>
+          <a:bodyPr wrap="none" lIns="0" tIns="0" rIns="0" bIns="0" rtlCol="0" anchor="ctr"/>
+          <a:lstStyle/>
+          <a:p>
+            <a:pPr algn="l" indent="0" marL="0">
+              <a:lnSpc>
+                <a:spcPct val="100000"/>
+              </a:lnSpc>
+              <a:buNone/>
+            </a:pPr>
+            <a:r>
+              <a:rPr lang="en-US" sz="1450" dirty="0">
+                <a:solidFill>
+                  <a:srgbClr val="1C1C1C"/>
+                </a:solidFill>
+                <a:latin typeface="Orbitron" pitchFamily="34" charset="0"/>
+                <a:ea typeface="Orbitron" pitchFamily="34" charset="-122"/>
+                <a:cs typeface="Orbitron" pitchFamily="34" charset="-120"/>
+              </a:rPr>
+              <a:t>04</a:t>
+            </a:r>
             <a:endParaRPr lang="en-US" sz="1450" dirty="0"/>
           </a:p>
-          <a:p>
-            <a:pPr algn="l" marL="294640" indent="-294640">
-              <a:lnSpc>
-                <a:spcPct val="133000"/>
-              </a:lnSpc>
-              <a:buSzPct val="100000"/>
-              <a:buChar char="•"/>
-            </a:pPr>
-            <a:r>
-              <a:rPr lang="en-US" sz="1450" dirty="0">
+        </p:txBody>
+      </p:sp>
+      <p:sp>
+        <p:nvSpPr>
+          <p:cNvPr id="15" name="Shape 13"/>
+          <p:cNvSpPr/>
+          <p:nvPr/>
+        </p:nvSpPr>
+        <p:spPr>
+          <a:xfrm>
+            <a:off x="6190301" y="4450159"/>
+            <a:ext cx="5339919" cy="25400"/>
+          </a:xfrm>
+          <a:prstGeom prst="rect">
+            <a:avLst/>
+          </a:prstGeom>
+          <a:solidFill>
+            <a:srgbClr val="57A1EB"/>
+          </a:solidFill>
+          <a:ln/>
+        </p:spPr>
+      </p:sp>
+      <p:sp>
+        <p:nvSpPr>
+          <p:cNvPr id="16" name="Text 14"/>
+          <p:cNvSpPr/>
+          <p:nvPr/>
+        </p:nvSpPr>
+        <p:spPr>
+          <a:xfrm>
+            <a:off x="6190301" y="4595416"/>
+            <a:ext cx="5339919" cy="295275"/>
+          </a:xfrm>
+          <a:prstGeom prst="rect">
+            <a:avLst/>
+          </a:prstGeom>
+          <a:noFill/>
+          <a:ln/>
+        </p:spPr>
+        <p:txBody>
+          <a:bodyPr wrap="none" lIns="0" tIns="0" rIns="0" bIns="0" rtlCol="0" anchor="t"/>
+          <a:lstStyle/>
+          <a:p>
+            <a:pPr algn="l" indent="0" marL="0">
+              <a:lnSpc>
+                <a:spcPct val="104000"/>
+              </a:lnSpc>
+              <a:buNone/>
+            </a:pPr>
+            <a:r>
+              <a:rPr lang="en-US" sz="1850" b="1" dirty="0">
                 <a:solidFill>
                   <a:srgbClr val="1C1C1C"/>
                 </a:solidFill>
-                <a:latin typeface="Roboto Condensed" pitchFamily="34" charset="0"/>
-                <a:ea typeface="Roboto Condensed" pitchFamily="34" charset="-122"/>
-                <a:cs typeface="Roboto Condensed" pitchFamily="34" charset="-120"/>
+                <a:latin typeface="Orbitron Bold" pitchFamily="34" charset="0"/>
+                <a:ea typeface="Orbitron Bold" pitchFamily="34" charset="-122"/>
+                <a:cs typeface="Orbitron Bold" pitchFamily="34" charset="-120"/>
               </a:rPr>
               <a:t>Your first complete AI usage log entry</a:t>
             </a:r>
-            <a:endParaRPr lang="en-US" sz="1450" dirty="0"/>
-          </a:p>
-        </p:txBody>
-      </p:sp>
-      <p:sp>
-        <p:nvSpPr>
-          <p:cNvPr id="5" name="Text 2"/>
+            <a:endParaRPr lang="en-US" sz="1850" dirty="0"/>
+          </a:p>
+        </p:txBody>
+      </p:sp>
+      <p:sp>
+        <p:nvSpPr>
+          <p:cNvPr id="17" name="Text 15"/>
           <p:cNvSpPr/>
           <p:nvPr/>
         </p:nvSpPr>
@@ -3022,7 +3230,7 @@
           <a:ln/>
         </p:spPr>
         <p:txBody>
-          <a:bodyPr wrap="none" lIns="0" tIns="99235" rIns="59541" bIns="0" rtlCol="0" anchor="t"/>
+          <a:bodyPr wrap="none" lIns="99235" tIns="0" rIns="59541" bIns="0" rtlCol="0" anchor="t"/>
           <a:lstStyle/>
           <a:p>
             <a:pPr algn="l" indent="0" marL="0">
@@ -3157,7 +3365,7 @@
           <a:ln/>
         </p:spPr>
         <p:txBody>
-          <a:bodyPr wrap="square" lIns="0" tIns="75608" rIns="0" bIns="0" rtlCol="0" anchor="t">
+          <a:bodyPr wrap="square" lIns="0" tIns="0" rIns="0" bIns="0" rtlCol="0" anchor="t">
             <a:normAutofit/>
           </a:bodyPr>
           <a:lstStyle/>
@@ -3178,7 +3386,7 @@
                 <a:ea typeface="Roboto Condensed" pitchFamily="34" charset="-122"/>
                 <a:cs typeface="Roboto Condensed" pitchFamily="34" charset="-120"/>
               </a:rPr>
-              <a:t>Congressional App Challenge closes October 26</a:t>
+              <a:t>The Congressional App Challenge closes in about six weeks</a:t>
             </a:r>
             <a:endParaRPr lang="en-US" sz="1450" dirty="0"/>
           </a:p>
@@ -3265,7 +3473,7 @@
           <a:ln/>
         </p:spPr>
         <p:txBody>
-          <a:bodyPr wrap="none" lIns="0" tIns="99235" rIns="59541" bIns="0" rtlCol="0" anchor="t"/>
+          <a:bodyPr wrap="none" lIns="99235" tIns="0" rIns="59541" bIns="0" rtlCol="0" anchor="t"/>
           <a:lstStyle/>
           <a:p>
             <a:pPr algn="l" indent="0" marL="0">
@@ -3400,7 +3608,7 @@
           <a:ln/>
         </p:spPr>
         <p:txBody>
-          <a:bodyPr wrap="square" lIns="0" tIns="75608" rIns="0" bIns="0" rtlCol="0" anchor="t">
+          <a:bodyPr wrap="square" lIns="0" tIns="0" rIns="0" bIns="0" rtlCol="0" anchor="t">
             <a:normAutofit/>
           </a:bodyPr>
           <a:lstStyle/>
@@ -3508,7 +3716,7 @@
           <a:ln/>
         </p:spPr>
         <p:txBody>
-          <a:bodyPr wrap="none" lIns="0" tIns="99235" rIns="59541" bIns="0" rtlCol="0" anchor="t"/>
+          <a:bodyPr wrap="none" lIns="99235" tIns="0" rIns="59541" bIns="0" rtlCol="0" anchor="t"/>
           <a:lstStyle/>
           <a:p>
             <a:pPr algn="l" indent="0" marL="0">
@@ -3557,24 +3765,72 @@
           <a:chExt cx="0" cy="0"/>
         </a:xfrm>
       </p:grpSpPr>
+      <p:sp>
+        <p:nvSpPr>
+          <p:cNvPr id="2" name="Text 0"/>
+          <p:cNvSpPr/>
+          <p:nvPr/>
+        </p:nvSpPr>
+        <p:spPr>
+          <a:xfrm>
+            <a:off x="661475" y="1769368"/>
+            <a:ext cx="10868745" cy="590649"/>
+          </a:xfrm>
+          <a:prstGeom prst="rect">
+            <a:avLst/>
+          </a:prstGeom>
+          <a:noFill/>
+          <a:ln/>
+        </p:spPr>
+        <p:txBody>
+          <a:bodyPr wrap="none" lIns="0" tIns="0" rIns="0" bIns="0" rtlCol="0" anchor="t"/>
+          <a:lstStyle/>
+          <a:p>
+            <a:pPr algn="l" indent="0" marL="0">
+              <a:lnSpc>
+                <a:spcPct val="104000"/>
+              </a:lnSpc>
+              <a:buNone/>
+            </a:pPr>
+            <a:r>
+              <a:rPr lang="en-US" sz="3700" b="1" dirty="0">
+                <a:solidFill>
+                  <a:srgbClr val="111111"/>
+                </a:solidFill>
+                <a:latin typeface="Orbitron Bold" pitchFamily="34" charset="0"/>
+                <a:ea typeface="Orbitron Bold" pitchFamily="34" charset="-122"/>
+                <a:cs typeface="Orbitron Bold" pitchFamily="34" charset="-120"/>
+              </a:rPr>
+              <a:t>Read the documents, not the doctrine</a:t>
+            </a:r>
+            <a:endParaRPr lang="en-US" sz="3700" dirty="0"/>
+          </a:p>
+        </p:txBody>
+      </p:sp>
       <p:pic>
         <p:nvPicPr>
-          <p:cNvPr id="2" name="Image 0" descr="preencoded.png">    </p:cNvPr>
+          <p:cNvPr id="3" name="Image 0" descr="preencoded.png">    </p:cNvPr>
           <p:cNvPicPr>
             <a:picLocks noChangeAspect="1"/>
           </p:cNvPicPr>
           <p:nvPr/>
         </p:nvPicPr>
         <p:blipFill>
-          <a:blip r:embed="rId1"/>
+          <a:blip r:embed="rId1">
+            <a:extLst>
+              <a:ext uri="{96DAC541-7B7A-43D3-8B79-37D633B846F1}">
+                <asvg:svgBlip xmlns:asvg="http://schemas.microsoft.com/office/drawing/2016/SVG/main" r:embed="rId2"/>
+              </a:ext>
+            </a:extLst>
+          </a:blip>
           <a:stretch>
             <a:fillRect/>
           </a:stretch>
         </p:blipFill>
         <p:spPr>
           <a:xfrm>
-            <a:off x="661475" y="1411585"/>
-            <a:ext cx="6903269" cy="3911898"/>
+            <a:off x="661475" y="2738041"/>
+            <a:ext cx="5339820" cy="1019373"/>
           </a:xfrm>
           <a:prstGeom prst="rect">
             <a:avLst/>
@@ -3583,14 +3839,86 @@
       </p:pic>
       <p:sp>
         <p:nvSpPr>
-          <p:cNvPr id="3" name="Text 0"/>
-          <p:cNvSpPr/>
-          <p:nvPr/>
-        </p:nvSpPr>
-        <p:spPr>
-          <a:xfrm>
-            <a:off x="8032251" y="1146870"/>
-            <a:ext cx="3504219" cy="2362597"/>
+          <p:cNvPr id="4" name="Text 1"/>
+          <p:cNvSpPr/>
+          <p:nvPr/>
+        </p:nvSpPr>
+        <p:spPr>
+          <a:xfrm>
+            <a:off x="977479" y="2952452"/>
+            <a:ext cx="4809409" cy="295275"/>
+          </a:xfrm>
+          <a:prstGeom prst="rect">
+            <a:avLst/>
+          </a:prstGeom>
+          <a:noFill/>
+          <a:ln/>
+        </p:spPr>
+        <p:txBody>
+          <a:bodyPr wrap="none" lIns="0" tIns="0" rIns="0" bIns="0" rtlCol="0" anchor="t"/>
+          <a:lstStyle/>
+          <a:p>
+            <a:pPr algn="l" indent="0" marL="0">
+              <a:lnSpc>
+                <a:spcPct val="104000"/>
+              </a:lnSpc>
+              <a:buNone/>
+            </a:pPr>
+            <a:r>
+              <a:rPr lang="en-US" sz="1850" b="1" dirty="0">
+                <a:solidFill>
+                  <a:srgbClr val="1C1C1C"/>
+                </a:solidFill>
+                <a:latin typeface="Orbitron Bold" pitchFamily="34" charset="0"/>
+                <a:ea typeface="Orbitron Bold" pitchFamily="34" charset="-122"/>
+                <a:cs typeface="Orbitron Bold" pitchFamily="34" charset="-120"/>
+              </a:rPr>
+              <a:t>The terms of the tool you used</a:t>
+            </a:r>
+            <a:endParaRPr lang="en-US" sz="1850" dirty="0"/>
+          </a:p>
+        </p:txBody>
+      </p:sp>
+      <p:pic>
+        <p:nvPicPr>
+          <p:cNvPr id="5" name="Image 1" descr="preencoded.png">    </p:cNvPr>
+          <p:cNvPicPr>
+            <a:picLocks noChangeAspect="1"/>
+          </p:cNvPicPr>
+          <p:nvPr/>
+        </p:nvPicPr>
+        <p:blipFill>
+          <a:blip r:embed="rId3">
+            <a:extLst>
+              <a:ext uri="{96DAC541-7B7A-43D3-8B79-37D633B846F1}">
+                <asvg:svgBlip xmlns:asvg="http://schemas.microsoft.com/office/drawing/2016/SVG/main" r:embed="rId4"/>
+              </a:ext>
+            </a:extLst>
+          </a:blip>
+          <a:stretch>
+            <a:fillRect/>
+          </a:stretch>
+        </p:blipFill>
+        <p:spPr>
+          <a:xfrm>
+            <a:off x="6190301" y="2738041"/>
+            <a:ext cx="5339919" cy="1019373"/>
+          </a:xfrm>
+          <a:prstGeom prst="rect">
+            <a:avLst/>
+          </a:prstGeom>
+        </p:spPr>
+      </p:pic>
+      <p:sp>
+        <p:nvSpPr>
+          <p:cNvPr id="6" name="Text 2"/>
+          <p:cNvSpPr/>
+          <p:nvPr/>
+        </p:nvSpPr>
+        <p:spPr>
+          <a:xfrm>
+            <a:off x="6506305" y="2952452"/>
+            <a:ext cx="4809509" cy="590550"/>
           </a:xfrm>
           <a:prstGeom prst="rect">
             <a:avLst/>
@@ -3611,131 +3939,171 @@
               <a:buNone/>
             </a:pPr>
             <a:r>
-              <a:rPr lang="en-US" sz="3700" b="1" dirty="0">
-                <a:solidFill>
-                  <a:srgbClr val="111111"/>
+              <a:rPr lang="en-US" sz="1850" b="1" dirty="0">
+                <a:solidFill>
+                  <a:srgbClr val="1C1C1C"/>
                 </a:solidFill>
                 <a:latin typeface="Orbitron Bold" pitchFamily="34" charset="0"/>
                 <a:ea typeface="Orbitron Bold" pitchFamily="34" charset="-122"/>
                 <a:cs typeface="Orbitron Bold" pitchFamily="34" charset="-120"/>
               </a:rPr>
-              <a:t>Read the documents, not the doctrine</a:t>
-            </a:r>
-            <a:endParaRPr lang="en-US" sz="3700" dirty="0"/>
-          </a:p>
-        </p:txBody>
-      </p:sp>
-      <p:sp>
-        <p:nvSpPr>
-          <p:cNvPr id="4" name="Text 1"/>
-          <p:cNvSpPr/>
-          <p:nvPr/>
-        </p:nvSpPr>
-        <p:spPr>
-          <a:xfrm>
-            <a:off x="8032251" y="3698478"/>
-            <a:ext cx="3504219" cy="2012752"/>
-          </a:xfrm>
-          <a:prstGeom prst="rect">
-            <a:avLst/>
-          </a:prstGeom>
-          <a:noFill/>
-          <a:ln/>
-        </p:spPr>
-        <p:txBody>
-          <a:bodyPr wrap="square" lIns="0" tIns="75608" rIns="0" bIns="0" rtlCol="0" anchor="t">
+              <a:t>The license of any code you included</a:t>
+            </a:r>
+            <a:endParaRPr lang="en-US" sz="1850" dirty="0"/>
+          </a:p>
+        </p:txBody>
+      </p:sp>
+      <p:pic>
+        <p:nvPicPr>
+          <p:cNvPr id="7" name="Image 2" descr="preencoded.png">    </p:cNvPr>
+          <p:cNvPicPr>
+            <a:picLocks noChangeAspect="1"/>
+          </p:cNvPicPr>
+          <p:nvPr/>
+        </p:nvPicPr>
+        <p:blipFill>
+          <a:blip r:embed="rId5">
+            <a:extLst>
+              <a:ext uri="{96DAC541-7B7A-43D3-8B79-37D633B846F1}">
+                <asvg:svgBlip xmlns:asvg="http://schemas.microsoft.com/office/drawing/2016/SVG/main" r:embed="rId6"/>
+              </a:ext>
+            </a:extLst>
+          </a:blip>
+          <a:stretch>
+            <a:fillRect/>
+          </a:stretch>
+        </p:blipFill>
+        <p:spPr>
+          <a:xfrm>
+            <a:off x="661475" y="3946426"/>
+            <a:ext cx="5339820" cy="1019373"/>
+          </a:xfrm>
+          <a:prstGeom prst="rect">
+            <a:avLst/>
+          </a:prstGeom>
+        </p:spPr>
+      </p:pic>
+      <p:sp>
+        <p:nvSpPr>
+          <p:cNvPr id="8" name="Text 3"/>
+          <p:cNvSpPr/>
+          <p:nvPr/>
+        </p:nvSpPr>
+        <p:spPr>
+          <a:xfrm>
+            <a:off x="977479" y="4160838"/>
+            <a:ext cx="4809409" cy="590550"/>
+          </a:xfrm>
+          <a:prstGeom prst="rect">
+            <a:avLst/>
+          </a:prstGeom>
+          <a:noFill/>
+          <a:ln/>
+        </p:spPr>
+        <p:txBody>
+          <a:bodyPr wrap="square" lIns="0" tIns="0" rIns="0" bIns="0" rtlCol="0" anchor="t">
             <a:normAutofit/>
           </a:bodyPr>
           <a:lstStyle/>
           <a:p>
-            <a:pPr algn="l" marL="294640" indent="-294640">
-              <a:lnSpc>
-                <a:spcPct val="133000"/>
-              </a:lnSpc>
-              <a:buSzPct val="100000"/>
-              <a:buChar char="•"/>
-            </a:pPr>
-            <a:r>
-              <a:rPr lang="en-US" sz="1450" dirty="0">
+            <a:pPr algn="l" indent="0" marL="0">
+              <a:lnSpc>
+                <a:spcPct val="104000"/>
+              </a:lnSpc>
+              <a:buNone/>
+            </a:pPr>
+            <a:r>
+              <a:rPr lang="en-US" sz="1850" b="1" dirty="0">
                 <a:solidFill>
                   <a:srgbClr val="1C1C1C"/>
                 </a:solidFill>
-                <a:latin typeface="Roboto Condensed" pitchFamily="34" charset="0"/>
-                <a:ea typeface="Roboto Condensed" pitchFamily="34" charset="-122"/>
-                <a:cs typeface="Roboto Condensed" pitchFamily="34" charset="-120"/>
-              </a:rPr>
-              <a:t>The terms of the tool you used</a:t>
-            </a:r>
-            <a:endParaRPr lang="en-US" sz="1450" dirty="0"/>
-          </a:p>
-          <a:p>
-            <a:pPr algn="l" marL="294640" indent="-294640">
-              <a:lnSpc>
-                <a:spcPct val="133000"/>
-              </a:lnSpc>
-              <a:buSzPct val="100000"/>
-              <a:buChar char="•"/>
-            </a:pPr>
-            <a:r>
-              <a:rPr lang="en-US" sz="1450" dirty="0">
+                <a:latin typeface="Orbitron Bold" pitchFamily="34" charset="0"/>
+                <a:ea typeface="Orbitron Bold" pitchFamily="34" charset="-122"/>
+                <a:cs typeface="Orbitron Bold" pitchFamily="34" charset="-120"/>
+              </a:rPr>
+              <a:t>The rules of the competition or the client</a:t>
+            </a:r>
+            <a:endParaRPr lang="en-US" sz="1850" dirty="0"/>
+          </a:p>
+        </p:txBody>
+      </p:sp>
+      <p:pic>
+        <p:nvPicPr>
+          <p:cNvPr id="9" name="Image 3" descr="preencoded.png">    </p:cNvPr>
+          <p:cNvPicPr>
+            <a:picLocks noChangeAspect="1"/>
+          </p:cNvPicPr>
+          <p:nvPr/>
+        </p:nvPicPr>
+        <p:blipFill>
+          <a:blip r:embed="rId7">
+            <a:extLst>
+              <a:ext uri="{96DAC541-7B7A-43D3-8B79-37D633B846F1}">
+                <asvg:svgBlip xmlns:asvg="http://schemas.microsoft.com/office/drawing/2016/SVG/main" r:embed="rId8"/>
+              </a:ext>
+            </a:extLst>
+          </a:blip>
+          <a:stretch>
+            <a:fillRect/>
+          </a:stretch>
+        </p:blipFill>
+        <p:spPr>
+          <a:xfrm>
+            <a:off x="6190301" y="3946426"/>
+            <a:ext cx="5339919" cy="1019373"/>
+          </a:xfrm>
+          <a:prstGeom prst="rect">
+            <a:avLst/>
+          </a:prstGeom>
+        </p:spPr>
+      </p:pic>
+      <p:sp>
+        <p:nvSpPr>
+          <p:cNvPr id="10" name="Text 4"/>
+          <p:cNvSpPr/>
+          <p:nvPr/>
+        </p:nvSpPr>
+        <p:spPr>
+          <a:xfrm>
+            <a:off x="6506305" y="4160838"/>
+            <a:ext cx="4809509" cy="590550"/>
+          </a:xfrm>
+          <a:prstGeom prst="rect">
+            <a:avLst/>
+          </a:prstGeom>
+          <a:noFill/>
+          <a:ln/>
+        </p:spPr>
+        <p:txBody>
+          <a:bodyPr wrap="square" lIns="0" tIns="0" rIns="0" bIns="0" rtlCol="0" anchor="t">
+            <a:normAutofit/>
+          </a:bodyPr>
+          <a:lstStyle/>
+          <a:p>
+            <a:pPr algn="l" indent="0" marL="0">
+              <a:lnSpc>
+                <a:spcPct val="104000"/>
+              </a:lnSpc>
+              <a:buNone/>
+            </a:pPr>
+            <a:r>
+              <a:rPr lang="en-US" sz="1850" b="1" dirty="0">
                 <a:solidFill>
                   <a:srgbClr val="1C1C1C"/>
                 </a:solidFill>
-                <a:latin typeface="Roboto Condensed" pitchFamily="34" charset="0"/>
-                <a:ea typeface="Roboto Condensed" pitchFamily="34" charset="-122"/>
-                <a:cs typeface="Roboto Condensed" pitchFamily="34" charset="-120"/>
-              </a:rPr>
-              <a:t>The license of any code you included</a:t>
-            </a:r>
-            <a:endParaRPr lang="en-US" sz="1450" dirty="0"/>
-          </a:p>
-          <a:p>
-            <a:pPr algn="l" marL="294640" indent="-294640">
-              <a:lnSpc>
-                <a:spcPct val="133000"/>
-              </a:lnSpc>
-              <a:buSzPct val="100000"/>
-              <a:buChar char="•"/>
-            </a:pPr>
-            <a:r>
-              <a:rPr lang="en-US" sz="1450" dirty="0">
-                <a:solidFill>
-                  <a:srgbClr val="1C1C1C"/>
-                </a:solidFill>
-                <a:latin typeface="Roboto Condensed" pitchFamily="34" charset="0"/>
-                <a:ea typeface="Roboto Condensed" pitchFamily="34" charset="-122"/>
-                <a:cs typeface="Roboto Condensed" pitchFamily="34" charset="-120"/>
-              </a:rPr>
-              <a:t>The rules of the competition or the client</a:t>
-            </a:r>
-            <a:endParaRPr lang="en-US" sz="1450" dirty="0"/>
-          </a:p>
-          <a:p>
-            <a:pPr algn="l" marL="294640" indent="-294640">
-              <a:lnSpc>
-                <a:spcPct val="133000"/>
-              </a:lnSpc>
-              <a:buSzPct val="100000"/>
-              <a:buChar char="•"/>
-            </a:pPr>
-            <a:r>
-              <a:rPr lang="en-US" sz="1450" dirty="0">
-                <a:solidFill>
-                  <a:srgbClr val="1C1C1C"/>
-                </a:solidFill>
-                <a:latin typeface="Roboto Condensed" pitchFamily="34" charset="0"/>
-                <a:ea typeface="Roboto Condensed" pitchFamily="34" charset="-122"/>
-                <a:cs typeface="Roboto Condensed" pitchFamily="34" charset="-120"/>
+                <a:latin typeface="Orbitron Bold" pitchFamily="34" charset="0"/>
+                <a:ea typeface="Orbitron Bold" pitchFamily="34" charset="-122"/>
+                <a:cs typeface="Orbitron Bold" pitchFamily="34" charset="-120"/>
               </a:rPr>
               <a:t>All three are written down and findable</a:t>
             </a:r>
-            <a:endParaRPr lang="en-US" sz="1450" dirty="0"/>
-          </a:p>
-        </p:txBody>
-      </p:sp>
-      <p:sp>
-        <p:nvSpPr>
-          <p:cNvPr id="5" name="Text 2"/>
+            <a:endParaRPr lang="en-US" sz="1850" dirty="0"/>
+          </a:p>
+        </p:txBody>
+      </p:sp>
+      <p:sp>
+        <p:nvSpPr>
+          <p:cNvPr id="11" name="Text 5"/>
           <p:cNvSpPr/>
           <p:nvPr/>
         </p:nvSpPr>
@@ -3751,7 +4119,7 @@
           <a:ln/>
         </p:spPr>
         <p:txBody>
-          <a:bodyPr wrap="none" lIns="0" tIns="99235" rIns="59541" bIns="0" rtlCol="0" anchor="t"/>
+          <a:bodyPr wrap="none" lIns="99235" tIns="0" rIns="59541" bIns="0" rtlCol="0" anchor="t"/>
           <a:lstStyle/>
           <a:p>
             <a:pPr algn="l" indent="0" marL="0">
@@ -3808,7 +4176,7 @@
         </p:nvSpPr>
         <p:spPr>
           <a:xfrm>
-            <a:off x="661475" y="1648817"/>
+            <a:off x="661475" y="1661517"/>
             <a:ext cx="10868745" cy="590649"/>
           </a:xfrm>
           <a:prstGeom prst="rect">
@@ -3842,46 +4210,43 @@
           </a:p>
         </p:txBody>
       </p:sp>
-      <p:pic>
-        <p:nvPicPr>
-          <p:cNvPr id="3" name="Image 0" descr="preencoded.png">    </p:cNvPr>
-          <p:cNvPicPr>
-            <a:picLocks noChangeAspect="1"/>
-          </p:cNvPicPr>
-          <p:nvPr/>
-        </p:nvPicPr>
-        <p:blipFill>
-          <a:blip r:embed="rId1">
-            <a:extLst>
-              <a:ext uri="{96DAC541-7B7A-43D3-8B79-37D633B846F1}">
-                <asvg:svgBlip xmlns:asvg="http://schemas.microsoft.com/office/drawing/2016/SVG/main" r:embed="rId2"/>
-              </a:ext>
-            </a:extLst>
-          </a:blip>
-          <a:stretch>
-            <a:fillRect/>
-          </a:stretch>
-        </p:blipFill>
-        <p:spPr>
-          <a:xfrm>
-            <a:off x="661475" y="2617490"/>
-            <a:ext cx="5339820" cy="1139924"/>
-          </a:xfrm>
-          <a:prstGeom prst="rect">
-            <a:avLst/>
-          </a:prstGeom>
-        </p:spPr>
-      </p:pic>
-      <p:sp>
-        <p:nvSpPr>
-          <p:cNvPr id="4" name="Text 1"/>
-          <p:cNvSpPr/>
-          <p:nvPr/>
-        </p:nvSpPr>
-        <p:spPr>
-          <a:xfrm>
-            <a:off x="977479" y="2831902"/>
-            <a:ext cx="4809409" cy="295275"/>
+      <p:sp>
+        <p:nvSpPr>
+          <p:cNvPr id="3" name="Shape 1"/>
+          <p:cNvSpPr/>
+          <p:nvPr/>
+        </p:nvSpPr>
+        <p:spPr>
+          <a:xfrm>
+            <a:off x="661475" y="2630190"/>
+            <a:ext cx="5339820" cy="1127224"/>
+          </a:xfrm>
+          <a:prstGeom prst="roundRect">
+            <a:avLst>
+              <a:gd name="adj" fmla="val 7043"/>
+            </a:avLst>
+          </a:prstGeom>
+          <a:solidFill>
+            <a:srgbClr val="D1E5FA"/>
+          </a:solidFill>
+          <a:ln w="19050">
+            <a:solidFill>
+              <a:srgbClr val="B7CBE0"/>
+            </a:solidFill>
+            <a:prstDash val="solid"/>
+          </a:ln>
+        </p:spPr>
+      </p:sp>
+      <p:sp>
+        <p:nvSpPr>
+          <p:cNvPr id="4" name="Text 2"/>
+          <p:cNvSpPr/>
+          <p:nvPr/>
+        </p:nvSpPr>
+        <p:spPr>
+          <a:xfrm>
+            <a:off x="869531" y="2838252"/>
+            <a:ext cx="4923707" cy="295275"/>
           </a:xfrm>
           <a:prstGeom prst="rect">
             <a:avLst/>
@@ -3916,14 +4281,14 @@
       </p:sp>
       <p:sp>
         <p:nvSpPr>
-          <p:cNvPr id="5" name="Text 2"/>
-          <p:cNvSpPr/>
-          <p:nvPr/>
-        </p:nvSpPr>
-        <p:spPr>
-          <a:xfrm>
-            <a:off x="977479" y="3240584"/>
-            <a:ext cx="4809409" cy="302419"/>
+          <p:cNvPr id="5" name="Text 3"/>
+          <p:cNvSpPr/>
+          <p:nvPr/>
+        </p:nvSpPr>
+        <p:spPr>
+          <a:xfrm>
+            <a:off x="869531" y="3246934"/>
+            <a:ext cx="4923707" cy="302419"/>
           </a:xfrm>
           <a:prstGeom prst="rect">
             <a:avLst/>
@@ -3956,46 +4321,43 @@
           </a:p>
         </p:txBody>
       </p:sp>
-      <p:pic>
-        <p:nvPicPr>
-          <p:cNvPr id="6" name="Image 1" descr="preencoded.png">    </p:cNvPr>
-          <p:cNvPicPr>
-            <a:picLocks noChangeAspect="1"/>
-          </p:cNvPicPr>
-          <p:nvPr/>
-        </p:nvPicPr>
-        <p:blipFill>
-          <a:blip r:embed="rId3">
-            <a:extLst>
-              <a:ext uri="{96DAC541-7B7A-43D3-8B79-37D633B846F1}">
-                <asvg:svgBlip xmlns:asvg="http://schemas.microsoft.com/office/drawing/2016/SVG/main" r:embed="rId4"/>
-              </a:ext>
-            </a:extLst>
-          </a:blip>
-          <a:stretch>
-            <a:fillRect/>
-          </a:stretch>
-        </p:blipFill>
-        <p:spPr>
-          <a:xfrm>
-            <a:off x="6190301" y="2617490"/>
-            <a:ext cx="5339919" cy="1139924"/>
-          </a:xfrm>
-          <a:prstGeom prst="rect">
-            <a:avLst/>
-          </a:prstGeom>
-        </p:spPr>
-      </p:pic>
-      <p:sp>
-        <p:nvSpPr>
-          <p:cNvPr id="7" name="Text 3"/>
-          <p:cNvSpPr/>
-          <p:nvPr/>
-        </p:nvSpPr>
-        <p:spPr>
-          <a:xfrm>
-            <a:off x="6506305" y="2831902"/>
-            <a:ext cx="4809509" cy="295275"/>
+      <p:sp>
+        <p:nvSpPr>
+          <p:cNvPr id="6" name="Shape 4"/>
+          <p:cNvSpPr/>
+          <p:nvPr/>
+        </p:nvSpPr>
+        <p:spPr>
+          <a:xfrm>
+            <a:off x="6190301" y="2630190"/>
+            <a:ext cx="5339919" cy="1127224"/>
+          </a:xfrm>
+          <a:prstGeom prst="roundRect">
+            <a:avLst>
+              <a:gd name="adj" fmla="val 7043"/>
+            </a:avLst>
+          </a:prstGeom>
+          <a:solidFill>
+            <a:srgbClr val="D1E5FA"/>
+          </a:solidFill>
+          <a:ln w="19050">
+            <a:solidFill>
+              <a:srgbClr val="B7CBE0"/>
+            </a:solidFill>
+            <a:prstDash val="solid"/>
+          </a:ln>
+        </p:spPr>
+      </p:sp>
+      <p:sp>
+        <p:nvSpPr>
+          <p:cNvPr id="7" name="Text 5"/>
+          <p:cNvSpPr/>
+          <p:nvPr/>
+        </p:nvSpPr>
+        <p:spPr>
+          <a:xfrm>
+            <a:off x="6398358" y="2838252"/>
+            <a:ext cx="4923806" cy="295275"/>
           </a:xfrm>
           <a:prstGeom prst="rect">
             <a:avLst/>
@@ -4030,14 +4392,14 @@
       </p:sp>
       <p:sp>
         <p:nvSpPr>
-          <p:cNvPr id="8" name="Text 4"/>
-          <p:cNvSpPr/>
-          <p:nvPr/>
-        </p:nvSpPr>
-        <p:spPr>
-          <a:xfrm>
-            <a:off x="6506305" y="3240584"/>
-            <a:ext cx="4809509" cy="302419"/>
+          <p:cNvPr id="8" name="Text 6"/>
+          <p:cNvSpPr/>
+          <p:nvPr/>
+        </p:nvSpPr>
+        <p:spPr>
+          <a:xfrm>
+            <a:off x="6398358" y="3246934"/>
+            <a:ext cx="4923806" cy="302419"/>
           </a:xfrm>
           <a:prstGeom prst="rect">
             <a:avLst/>
@@ -4070,46 +4432,43 @@
           </a:p>
         </p:txBody>
       </p:sp>
-      <p:pic>
-        <p:nvPicPr>
-          <p:cNvPr id="9" name="Image 2" descr="preencoded.png">    </p:cNvPr>
-          <p:cNvPicPr>
-            <a:picLocks noChangeAspect="1"/>
-          </p:cNvPicPr>
-          <p:nvPr/>
-        </p:nvPicPr>
-        <p:blipFill>
-          <a:blip r:embed="rId5">
-            <a:extLst>
-              <a:ext uri="{96DAC541-7B7A-43D3-8B79-37D633B846F1}">
-                <asvg:svgBlip xmlns:asvg="http://schemas.microsoft.com/office/drawing/2016/SVG/main" r:embed="rId6"/>
-              </a:ext>
-            </a:extLst>
-          </a:blip>
-          <a:stretch>
-            <a:fillRect/>
-          </a:stretch>
-        </p:blipFill>
+      <p:sp>
+        <p:nvSpPr>
+          <p:cNvPr id="9" name="Shape 7"/>
+          <p:cNvSpPr/>
+          <p:nvPr/>
+        </p:nvSpPr>
         <p:spPr>
           <a:xfrm>
             <a:off x="661475" y="3946426"/>
-            <a:ext cx="5339820" cy="1139924"/>
-          </a:xfrm>
-          <a:prstGeom prst="rect">
-            <a:avLst/>
-          </a:prstGeom>
-        </p:spPr>
-      </p:pic>
-      <p:sp>
-        <p:nvSpPr>
-          <p:cNvPr id="10" name="Text 5"/>
-          <p:cNvSpPr/>
-          <p:nvPr/>
-        </p:nvSpPr>
-        <p:spPr>
-          <a:xfrm>
-            <a:off x="977479" y="4160838"/>
-            <a:ext cx="4809409" cy="295275"/>
+            <a:ext cx="5339820" cy="1127224"/>
+          </a:xfrm>
+          <a:prstGeom prst="roundRect">
+            <a:avLst>
+              <a:gd name="adj" fmla="val 7043"/>
+            </a:avLst>
+          </a:prstGeom>
+          <a:solidFill>
+            <a:srgbClr val="D1E5FA"/>
+          </a:solidFill>
+          <a:ln w="19050">
+            <a:solidFill>
+              <a:srgbClr val="B7CBE0"/>
+            </a:solidFill>
+            <a:prstDash val="solid"/>
+          </a:ln>
+        </p:spPr>
+      </p:sp>
+      <p:sp>
+        <p:nvSpPr>
+          <p:cNvPr id="10" name="Text 8"/>
+          <p:cNvSpPr/>
+          <p:nvPr/>
+        </p:nvSpPr>
+        <p:spPr>
+          <a:xfrm>
+            <a:off x="869531" y="4154488"/>
+            <a:ext cx="4923707" cy="295275"/>
           </a:xfrm>
           <a:prstGeom prst="rect">
             <a:avLst/>
@@ -4144,14 +4503,14 @@
       </p:sp>
       <p:sp>
         <p:nvSpPr>
-          <p:cNvPr id="11" name="Text 6"/>
-          <p:cNvSpPr/>
-          <p:nvPr/>
-        </p:nvSpPr>
-        <p:spPr>
-          <a:xfrm>
-            <a:off x="977479" y="4569520"/>
-            <a:ext cx="4809409" cy="302419"/>
+          <p:cNvPr id="11" name="Text 9"/>
+          <p:cNvSpPr/>
+          <p:nvPr/>
+        </p:nvSpPr>
+        <p:spPr>
+          <a:xfrm>
+            <a:off x="869531" y="4563170"/>
+            <a:ext cx="4923707" cy="302419"/>
           </a:xfrm>
           <a:prstGeom prst="rect">
             <a:avLst/>
@@ -4184,46 +4543,43 @@
           </a:p>
         </p:txBody>
       </p:sp>
-      <p:pic>
-        <p:nvPicPr>
-          <p:cNvPr id="12" name="Image 3" descr="preencoded.png">    </p:cNvPr>
-          <p:cNvPicPr>
-            <a:picLocks noChangeAspect="1"/>
-          </p:cNvPicPr>
-          <p:nvPr/>
-        </p:nvPicPr>
-        <p:blipFill>
-          <a:blip r:embed="rId7">
-            <a:extLst>
-              <a:ext uri="{96DAC541-7B7A-43D3-8B79-37D633B846F1}">
-                <asvg:svgBlip xmlns:asvg="http://schemas.microsoft.com/office/drawing/2016/SVG/main" r:embed="rId8"/>
-              </a:ext>
-            </a:extLst>
-          </a:blip>
-          <a:stretch>
-            <a:fillRect/>
-          </a:stretch>
-        </p:blipFill>
+      <p:sp>
+        <p:nvSpPr>
+          <p:cNvPr id="12" name="Shape 10"/>
+          <p:cNvSpPr/>
+          <p:nvPr/>
+        </p:nvSpPr>
         <p:spPr>
           <a:xfrm>
             <a:off x="6190301" y="3946426"/>
-            <a:ext cx="5339919" cy="1139924"/>
-          </a:xfrm>
-          <a:prstGeom prst="rect">
-            <a:avLst/>
-          </a:prstGeom>
-        </p:spPr>
-      </p:pic>
-      <p:sp>
-        <p:nvSpPr>
-          <p:cNvPr id="13" name="Text 7"/>
-          <p:cNvSpPr/>
-          <p:nvPr/>
-        </p:nvSpPr>
-        <p:spPr>
-          <a:xfrm>
-            <a:off x="6506305" y="4160838"/>
-            <a:ext cx="4809509" cy="295275"/>
+            <a:ext cx="5339919" cy="1127224"/>
+          </a:xfrm>
+          <a:prstGeom prst="roundRect">
+            <a:avLst>
+              <a:gd name="adj" fmla="val 7043"/>
+            </a:avLst>
+          </a:prstGeom>
+          <a:solidFill>
+            <a:srgbClr val="D1E5FA"/>
+          </a:solidFill>
+          <a:ln w="19050">
+            <a:solidFill>
+              <a:srgbClr val="B7CBE0"/>
+            </a:solidFill>
+            <a:prstDash val="solid"/>
+          </a:ln>
+        </p:spPr>
+      </p:sp>
+      <p:sp>
+        <p:nvSpPr>
+          <p:cNvPr id="13" name="Text 11"/>
+          <p:cNvSpPr/>
+          <p:nvPr/>
+        </p:nvSpPr>
+        <p:spPr>
+          <a:xfrm>
+            <a:off x="6398358" y="4154488"/>
+            <a:ext cx="4923806" cy="295275"/>
           </a:xfrm>
           <a:prstGeom prst="rect">
             <a:avLst/>
@@ -4258,14 +4614,14 @@
       </p:sp>
       <p:sp>
         <p:nvSpPr>
-          <p:cNvPr id="14" name="Text 8"/>
-          <p:cNvSpPr/>
-          <p:nvPr/>
-        </p:nvSpPr>
-        <p:spPr>
-          <a:xfrm>
-            <a:off x="6506305" y="4569520"/>
-            <a:ext cx="4809509" cy="302419"/>
+          <p:cNvPr id="14" name="Text 12"/>
+          <p:cNvSpPr/>
+          <p:nvPr/>
+        </p:nvSpPr>
+        <p:spPr>
+          <a:xfrm>
+            <a:off x="6398358" y="4563170"/>
+            <a:ext cx="4923806" cy="302419"/>
           </a:xfrm>
           <a:prstGeom prst="rect">
             <a:avLst/>
@@ -4300,7 +4656,7 @@
       </p:sp>
       <p:sp>
         <p:nvSpPr>
-          <p:cNvPr id="15" name="Text 9"/>
+          <p:cNvPr id="15" name="Text 13"/>
           <p:cNvSpPr/>
           <p:nvPr/>
         </p:nvSpPr>
@@ -4316,7 +4672,7 @@
           <a:ln/>
         </p:spPr>
         <p:txBody>
-          <a:bodyPr wrap="none" lIns="0" tIns="99235" rIns="59541" bIns="0" rtlCol="0" anchor="t"/>
+          <a:bodyPr wrap="none" lIns="99235" tIns="0" rIns="59541" bIns="0" rtlCol="0" anchor="t"/>
           <a:lstStyle/>
           <a:p>
             <a:pPr algn="l" indent="0" marL="0">
@@ -4589,7 +4945,7 @@
           <a:ln/>
         </p:spPr>
         <p:txBody>
-          <a:bodyPr wrap="none" lIns="0" tIns="99235" rIns="59541" bIns="0" rtlCol="0" anchor="t"/>
+          <a:bodyPr wrap="none" lIns="99235" tIns="0" rIns="59541" bIns="0" rtlCol="0" anchor="t"/>
           <a:lstStyle/>
           <a:p>
             <a:pPr algn="l" indent="0" marL="0">
@@ -4864,7 +5220,7 @@
           <a:ln/>
         </p:spPr>
         <p:txBody>
-          <a:bodyPr wrap="none" lIns="0" tIns="99235" rIns="59541" bIns="0" rtlCol="0" anchor="t"/>
+          <a:bodyPr wrap="none" lIns="99235" tIns="0" rIns="59541" bIns="0" rtlCol="0" anchor="t"/>
           <a:lstStyle/>
           <a:p>
             <a:pPr algn="l" indent="0" marL="0">
@@ -4945,7 +5301,7 @@
         </p:nvSpPr>
         <p:spPr>
           <a:xfrm>
-            <a:off x="5233360" y="1931194"/>
+            <a:off x="5233360" y="1502370"/>
             <a:ext cx="6296860" cy="1181298"/>
           </a:xfrm>
           <a:prstGeom prst="rect">
@@ -4983,33 +5339,96 @@
       </p:sp>
       <p:sp>
         <p:nvSpPr>
-          <p:cNvPr id="4" name="Text 1"/>
-          <p:cNvSpPr/>
-          <p:nvPr/>
-        </p:nvSpPr>
-        <p:spPr>
-          <a:xfrm>
-            <a:off x="5233360" y="3395960"/>
-            <a:ext cx="6296860" cy="1407914"/>
-          </a:xfrm>
-          <a:prstGeom prst="rect">
-            <a:avLst/>
-          </a:prstGeom>
-          <a:noFill/>
-          <a:ln/>
-        </p:spPr>
-        <p:txBody>
-          <a:bodyPr wrap="square" lIns="0" tIns="75608" rIns="0" bIns="0" rtlCol="0" anchor="t">
+          <p:cNvPr id="4" name="Shape 1"/>
+          <p:cNvSpPr/>
+          <p:nvPr/>
+        </p:nvSpPr>
+        <p:spPr>
+          <a:xfrm>
+            <a:off x="5097236" y="2967137"/>
+            <a:ext cx="3190101" cy="1448197"/>
+          </a:xfrm>
+          <a:prstGeom prst="roundRect">
+            <a:avLst>
+              <a:gd name="adj" fmla="val 9397"/>
+            </a:avLst>
+          </a:prstGeom>
+          <a:solidFill>
+            <a:srgbClr val="57A1EB"/>
+          </a:solidFill>
+          <a:ln/>
+        </p:spPr>
+      </p:sp>
+      <p:sp>
+        <p:nvSpPr>
+          <p:cNvPr id="5" name="Text 2"/>
+          <p:cNvSpPr/>
+          <p:nvPr/>
+        </p:nvSpPr>
+        <p:spPr>
+          <a:xfrm>
+            <a:off x="5286243" y="3156148"/>
+            <a:ext cx="2812087" cy="295275"/>
+          </a:xfrm>
+          <a:prstGeom prst="rect">
+            <a:avLst/>
+          </a:prstGeom>
+          <a:noFill/>
+          <a:ln/>
+        </p:spPr>
+        <p:txBody>
+          <a:bodyPr wrap="none" lIns="0" tIns="0" rIns="0" bIns="0" rtlCol="0" anchor="t"/>
+          <a:lstStyle/>
+          <a:p>
+            <a:pPr algn="l" indent="0" marL="0">
+              <a:lnSpc>
+                <a:spcPct val="104000"/>
+              </a:lnSpc>
+              <a:buNone/>
+            </a:pPr>
+            <a:r>
+              <a:rPr lang="en-US" sz="1850" b="1" dirty="0">
+                <a:solidFill>
+                  <a:srgbClr val="111111"/>
+                </a:solidFill>
+                <a:latin typeface="Orbitron Bold" pitchFamily="34" charset="0"/>
+                <a:ea typeface="Orbitron Bold" pitchFamily="34" charset="-122"/>
+                <a:cs typeface="Orbitron Bold" pitchFamily="34" charset="-120"/>
+              </a:rPr>
+              <a:t>Yes: you own it</a:t>
+            </a:r>
+            <a:endParaRPr lang="en-US" sz="1850" dirty="0"/>
+          </a:p>
+        </p:txBody>
+      </p:sp>
+      <p:sp>
+        <p:nvSpPr>
+          <p:cNvPr id="6" name="Text 3"/>
+          <p:cNvSpPr/>
+          <p:nvPr/>
+        </p:nvSpPr>
+        <p:spPr>
+          <a:xfrm>
+            <a:off x="5286243" y="3640435"/>
+            <a:ext cx="2812087" cy="604838"/>
+          </a:xfrm>
+          <a:prstGeom prst="rect">
+            <a:avLst/>
+          </a:prstGeom>
+          <a:noFill/>
+          <a:ln/>
+        </p:spPr>
+        <p:txBody>
+          <a:bodyPr wrap="square" lIns="0" tIns="0" rIns="0" bIns="0" rtlCol="0" anchor="t">
             <a:normAutofit/>
           </a:bodyPr>
           <a:lstStyle/>
           <a:p>
-            <a:pPr algn="l" marL="294640" indent="-294640">
+            <a:pPr algn="l" indent="0" marL="0">
               <a:lnSpc>
                 <a:spcPct val="133000"/>
               </a:lnSpc>
-              <a:buSzPct val="100000"/>
-              <a:buChar char="•"/>
+              <a:buNone/>
             </a:pPr>
             <a:r>
               <a:rPr lang="en-US" sz="1450" dirty="0">
@@ -5020,17 +5439,82 @@
                 <a:ea typeface="Roboto Condensed" pitchFamily="34" charset="-122"/>
                 <a:cs typeface="Roboto Condensed" pitchFamily="34" charset="-120"/>
               </a:rPr>
-              <a:t>Does the prompt writer own the output</a:t>
+              <a:t>You chose, judged, revised, integrated</a:t>
             </a:r>
             <a:endParaRPr lang="en-US" sz="1450" dirty="0"/>
           </a:p>
-          <a:p>
-            <a:pPr algn="l" marL="294640" indent="-294640">
+        </p:txBody>
+      </p:sp>
+      <p:sp>
+        <p:nvSpPr>
+          <p:cNvPr id="7" name="Text 4"/>
+          <p:cNvSpPr/>
+          <p:nvPr/>
+        </p:nvSpPr>
+        <p:spPr>
+          <a:xfrm>
+            <a:off x="8618719" y="3156148"/>
+            <a:ext cx="2917851" cy="295275"/>
+          </a:xfrm>
+          <a:prstGeom prst="rect">
+            <a:avLst/>
+          </a:prstGeom>
+          <a:noFill/>
+          <a:ln/>
+        </p:spPr>
+        <p:txBody>
+          <a:bodyPr wrap="none" lIns="0" tIns="0" rIns="0" bIns="0" rtlCol="0" anchor="t"/>
+          <a:lstStyle/>
+          <a:p>
+            <a:pPr algn="l" indent="0" marL="0">
+              <a:lnSpc>
+                <a:spcPct val="104000"/>
+              </a:lnSpc>
+              <a:buNone/>
+            </a:pPr>
+            <a:r>
+              <a:rPr lang="en-US" sz="1850" b="1" dirty="0">
+                <a:solidFill>
+                  <a:srgbClr val="111111"/>
+                </a:solidFill>
+                <a:latin typeface="Orbitron Bold" pitchFamily="34" charset="0"/>
+                <a:ea typeface="Orbitron Bold" pitchFamily="34" charset="-122"/>
+                <a:cs typeface="Orbitron Bold" pitchFamily="34" charset="-120"/>
+              </a:rPr>
+              <a:t>No: you do not</a:t>
+            </a:r>
+            <a:endParaRPr lang="en-US" sz="1850" dirty="0"/>
+          </a:p>
+        </p:txBody>
+      </p:sp>
+      <p:sp>
+        <p:nvSpPr>
+          <p:cNvPr id="8" name="Text 5"/>
+          <p:cNvSpPr/>
+          <p:nvPr/>
+        </p:nvSpPr>
+        <p:spPr>
+          <a:xfrm>
+            <a:off x="8618719" y="3640435"/>
+            <a:ext cx="2917851" cy="604838"/>
+          </a:xfrm>
+          <a:prstGeom prst="rect">
+            <a:avLst/>
+          </a:prstGeom>
+          <a:noFill/>
+          <a:ln/>
+        </p:spPr>
+        <p:txBody>
+          <a:bodyPr wrap="square" lIns="0" tIns="0" rIns="0" bIns="0" rtlCol="0" anchor="t">
+            <a:normAutofit/>
+          </a:bodyPr>
+          <a:lstStyle/>
+          <a:p>
+            <a:pPr algn="l" indent="0" marL="0">
               <a:lnSpc>
                 <a:spcPct val="133000"/>
               </a:lnSpc>
-              <a:buSzPct val="100000"/>
-              <a:buChar char="•"/>
+              <a:buNone/>
             </a:pPr>
             <a:r>
               <a:rPr lang="en-US" sz="1450" dirty="0">
@@ -5041,17 +5525,40 @@
                 <a:ea typeface="Roboto Condensed" pitchFamily="34" charset="-122"/>
                 <a:cs typeface="Roboto Condensed" pitchFamily="34" charset="-120"/>
               </a:rPr>
-              <a:t>Yes: you chose, judged, revised, integrated</a:t>
+              <a:t>It was assembled from other people's work</a:t>
             </a:r>
             <a:endParaRPr lang="en-US" sz="1450" dirty="0"/>
           </a:p>
-          <a:p>
-            <a:pPr algn="l" marL="294640" indent="-294640">
+        </p:txBody>
+      </p:sp>
+      <p:sp>
+        <p:nvSpPr>
+          <p:cNvPr id="9" name="Text 6"/>
+          <p:cNvSpPr/>
+          <p:nvPr/>
+        </p:nvSpPr>
+        <p:spPr>
+          <a:xfrm>
+            <a:off x="5233360" y="4627959"/>
+            <a:ext cx="6296860" cy="604838"/>
+          </a:xfrm>
+          <a:prstGeom prst="rect">
+            <a:avLst/>
+          </a:prstGeom>
+          <a:noFill/>
+          <a:ln/>
+        </p:spPr>
+        <p:txBody>
+          <a:bodyPr wrap="square" lIns="0" tIns="0" rIns="0" bIns="0" rtlCol="0" anchor="t">
+            <a:normAutofit/>
+          </a:bodyPr>
+          <a:lstStyle/>
+          <a:p>
+            <a:pPr algn="l" indent="0" marL="0">
               <a:lnSpc>
                 <a:spcPct val="133000"/>
               </a:lnSpc>
-              <a:buSzPct val="100000"/>
-              <a:buChar char="•"/>
+              <a:buNone/>
             </a:pPr>
             <a:r>
               <a:rPr lang="en-US" sz="1450" dirty="0">
@@ -5062,36 +5569,15 @@
                 <a:ea typeface="Roboto Condensed" pitchFamily="34" charset="-122"/>
                 <a:cs typeface="Roboto Condensed" pitchFamily="34" charset="-120"/>
               </a:rPr>
-              <a:t>No: it was assembled from other people's work</a:t>
+              <a:t>Does the prompt writer own the output? Pick a side and argue the other one honestly.</a:t>
             </a:r>
             <a:endParaRPr lang="en-US" sz="1450" dirty="0"/>
           </a:p>
-          <a:p>
-            <a:pPr algn="l" marL="294640" indent="-294640">
-              <a:lnSpc>
-                <a:spcPct val="133000"/>
-              </a:lnSpc>
-              <a:buSzPct val="100000"/>
-              <a:buChar char="•"/>
-            </a:pPr>
-            <a:r>
-              <a:rPr lang="en-US" sz="1450" dirty="0">
-                <a:solidFill>
-                  <a:srgbClr val="1C1C1C"/>
-                </a:solidFill>
-                <a:latin typeface="Roboto Condensed" pitchFamily="34" charset="0"/>
-                <a:ea typeface="Roboto Condensed" pitchFamily="34" charset="-122"/>
-                <a:cs typeface="Roboto Condensed" pitchFamily="34" charset="-120"/>
-              </a:rPr>
-              <a:t>Pick a side and argue the other one honestly</a:t>
-            </a:r>
-            <a:endParaRPr lang="en-US" sz="1450" dirty="0"/>
-          </a:p>
-        </p:txBody>
-      </p:sp>
-      <p:sp>
-        <p:nvSpPr>
-          <p:cNvPr id="5" name="Text 2"/>
+        </p:txBody>
+      </p:sp>
+      <p:sp>
+        <p:nvSpPr>
+          <p:cNvPr id="10" name="Text 7"/>
           <p:cNvSpPr/>
           <p:nvPr/>
         </p:nvSpPr>
@@ -5107,7 +5593,7 @@
           <a:ln/>
         </p:spPr>
         <p:txBody>
-          <a:bodyPr wrap="none" lIns="0" tIns="99235" rIns="59541" bIns="0" rtlCol="0" anchor="t"/>
+          <a:bodyPr wrap="none" lIns="99235" tIns="0" rIns="59541" bIns="0" rtlCol="0" anchor="t"/>
           <a:lstStyle/>
           <a:p>
             <a:pPr algn="l" indent="0" marL="0">
@@ -5172,8 +5658,8 @@
         </p:blipFill>
         <p:spPr>
           <a:xfrm>
-            <a:off x="661475" y="1411585"/>
-            <a:ext cx="6903269" cy="3911898"/>
+            <a:off x="0" y="0"/>
+            <a:ext cx="4571886" cy="6858000"/>
           </a:xfrm>
           <a:prstGeom prst="rect">
             <a:avLst/>
@@ -5188,8 +5674,8 @@
         </p:nvSpPr>
         <p:spPr>
           <a:xfrm>
-            <a:off x="8032251" y="1449189"/>
-            <a:ext cx="3504219" cy="2362597"/>
+            <a:off x="5233360" y="1217613"/>
+            <a:ext cx="6296860" cy="1181298"/>
           </a:xfrm>
           <a:prstGeom prst="rect">
             <a:avLst/>
@@ -5226,121 +5712,457 @@
       </p:sp>
       <p:sp>
         <p:nvSpPr>
-          <p:cNvPr id="4" name="Text 1"/>
-          <p:cNvSpPr/>
-          <p:nvPr/>
-        </p:nvSpPr>
-        <p:spPr>
-          <a:xfrm>
-            <a:off x="8032251" y="4000798"/>
-            <a:ext cx="3504219" cy="1407914"/>
-          </a:xfrm>
-          <a:prstGeom prst="rect">
-            <a:avLst/>
-          </a:prstGeom>
-          <a:noFill/>
-          <a:ln/>
-        </p:spPr>
-        <p:txBody>
-          <a:bodyPr wrap="square" lIns="0" tIns="75608" rIns="0" bIns="0" rtlCol="0" anchor="t">
-            <a:normAutofit/>
-          </a:bodyPr>
-          <a:lstStyle/>
-          <a:p>
-            <a:pPr algn="l" marL="294640" indent="-294640">
-              <a:lnSpc>
-                <a:spcPct val="133000"/>
-              </a:lnSpc>
-              <a:buSzPct val="100000"/>
-              <a:buChar char="•"/>
-            </a:pPr>
-            <a:r>
-              <a:rPr lang="en-US" sz="1450" dirty="0">
+          <p:cNvPr id="4" name="Shape 1"/>
+          <p:cNvSpPr/>
+          <p:nvPr/>
+        </p:nvSpPr>
+        <p:spPr>
+          <a:xfrm>
+            <a:off x="5233360" y="2682379"/>
+            <a:ext cx="425241" cy="425252"/>
+          </a:xfrm>
+          <a:prstGeom prst="roundRect">
+            <a:avLst>
+              <a:gd name="adj" fmla="val 18669"/>
+            </a:avLst>
+          </a:prstGeom>
+          <a:solidFill>
+            <a:srgbClr val="D1E5FA"/>
+          </a:solidFill>
+          <a:ln w="19050">
+            <a:solidFill>
+              <a:srgbClr val="B7CBE0"/>
+            </a:solidFill>
+            <a:prstDash val="solid"/>
+          </a:ln>
+        </p:spPr>
+      </p:sp>
+      <p:sp>
+        <p:nvSpPr>
+          <p:cNvPr id="5" name="Text 2"/>
+          <p:cNvSpPr/>
+          <p:nvPr/>
+        </p:nvSpPr>
+        <p:spPr>
+          <a:xfrm>
+            <a:off x="5304251" y="2717800"/>
+            <a:ext cx="283461" cy="354409"/>
+          </a:xfrm>
+          <a:prstGeom prst="rect">
+            <a:avLst/>
+          </a:prstGeom>
+          <a:noFill/>
+          <a:ln/>
+        </p:spPr>
+        <p:txBody>
+          <a:bodyPr wrap="none" lIns="0" tIns="0" rIns="0" bIns="0" rtlCol="0" anchor="ctr"/>
+          <a:lstStyle/>
+          <a:p>
+            <a:pPr algn="ctr" indent="0" marL="0">
+              <a:lnSpc>
+                <a:spcPct val="100000"/>
+              </a:lnSpc>
+              <a:buNone/>
+            </a:pPr>
+            <a:r>
+              <a:rPr lang="en-US" sz="2200" b="1" dirty="0">
                 <a:solidFill>
                   <a:srgbClr val="1C1C1C"/>
                 </a:solidFill>
-                <a:latin typeface="Roboto Condensed" pitchFamily="34" charset="0"/>
-                <a:ea typeface="Roboto Condensed" pitchFamily="34" charset="-122"/>
-                <a:cs typeface="Roboto Condensed" pitchFamily="34" charset="-120"/>
+                <a:latin typeface="Orbitron Bold" pitchFamily="34" charset="0"/>
+                <a:ea typeface="Orbitron Bold" pitchFamily="34" charset="-122"/>
+                <a:cs typeface="Orbitron Bold" pitchFamily="34" charset="-120"/>
+              </a:rPr>
+              <a:t>1</a:t>
+            </a:r>
+            <a:endParaRPr lang="en-US" sz="2200" dirty="0"/>
+          </a:p>
+        </p:txBody>
+      </p:sp>
+      <p:sp>
+        <p:nvSpPr>
+          <p:cNvPr id="6" name="Text 3"/>
+          <p:cNvSpPr/>
+          <p:nvPr/>
+        </p:nvSpPr>
+        <p:spPr>
+          <a:xfrm>
+            <a:off x="5847608" y="2747268"/>
+            <a:ext cx="5682612" cy="295275"/>
+          </a:xfrm>
+          <a:prstGeom prst="rect">
+            <a:avLst/>
+          </a:prstGeom>
+          <a:noFill/>
+          <a:ln/>
+        </p:spPr>
+        <p:txBody>
+          <a:bodyPr wrap="none" lIns="0" tIns="0" rIns="0" bIns="0" rtlCol="0" anchor="t"/>
+          <a:lstStyle/>
+          <a:p>
+            <a:pPr algn="l" indent="0" marL="0">
+              <a:lnSpc>
+                <a:spcPct val="104000"/>
+              </a:lnSpc>
+              <a:buNone/>
+            </a:pPr>
+            <a:r>
+              <a:rPr lang="en-US" sz="1850" b="1" dirty="0">
+                <a:solidFill>
+                  <a:srgbClr val="1C1C1C"/>
+                </a:solidFill>
+                <a:latin typeface="Orbitron Bold" pitchFamily="34" charset="0"/>
+                <a:ea typeface="Orbitron Bold" pitchFamily="34" charset="-122"/>
+                <a:cs typeface="Orbitron Bold" pitchFamily="34" charset="-120"/>
               </a:rPr>
               <a:t>State your position clearly</a:t>
             </a:r>
-            <a:endParaRPr lang="en-US" sz="1450" dirty="0"/>
-          </a:p>
-          <a:p>
-            <a:pPr algn="l" marL="294640" indent="-294640">
-              <a:lnSpc>
-                <a:spcPct val="133000"/>
-              </a:lnSpc>
-              <a:buSzPct val="100000"/>
-              <a:buChar char="•"/>
-            </a:pPr>
-            <a:r>
-              <a:rPr lang="en-US" sz="1450" dirty="0">
+            <a:endParaRPr lang="en-US" sz="1850" dirty="0"/>
+          </a:p>
+        </p:txBody>
+      </p:sp>
+      <p:sp>
+        <p:nvSpPr>
+          <p:cNvPr id="7" name="Shape 4"/>
+          <p:cNvSpPr/>
+          <p:nvPr/>
+        </p:nvSpPr>
+        <p:spPr>
+          <a:xfrm>
+            <a:off x="5233360" y="3485654"/>
+            <a:ext cx="425241" cy="425252"/>
+          </a:xfrm>
+          <a:prstGeom prst="roundRect">
+            <a:avLst>
+              <a:gd name="adj" fmla="val 18669"/>
+            </a:avLst>
+          </a:prstGeom>
+          <a:solidFill>
+            <a:srgbClr val="D1E5FA"/>
+          </a:solidFill>
+          <a:ln w="19050">
+            <a:solidFill>
+              <a:srgbClr val="B7CBE0"/>
+            </a:solidFill>
+            <a:prstDash val="solid"/>
+          </a:ln>
+        </p:spPr>
+      </p:sp>
+      <p:sp>
+        <p:nvSpPr>
+          <p:cNvPr id="8" name="Text 5"/>
+          <p:cNvSpPr/>
+          <p:nvPr/>
+        </p:nvSpPr>
+        <p:spPr>
+          <a:xfrm>
+            <a:off x="5304251" y="3521075"/>
+            <a:ext cx="283461" cy="354409"/>
+          </a:xfrm>
+          <a:prstGeom prst="rect">
+            <a:avLst/>
+          </a:prstGeom>
+          <a:noFill/>
+          <a:ln/>
+        </p:spPr>
+        <p:txBody>
+          <a:bodyPr wrap="none" lIns="0" tIns="0" rIns="0" bIns="0" rtlCol="0" anchor="ctr"/>
+          <a:lstStyle/>
+          <a:p>
+            <a:pPr algn="ctr" indent="0" marL="0">
+              <a:lnSpc>
+                <a:spcPct val="100000"/>
+              </a:lnSpc>
+              <a:buNone/>
+            </a:pPr>
+            <a:r>
+              <a:rPr lang="en-US" sz="2200" b="1" dirty="0">
                 <a:solidFill>
                   <a:srgbClr val="1C1C1C"/>
                 </a:solidFill>
-                <a:latin typeface="Roboto Condensed" pitchFamily="34" charset="0"/>
-                <a:ea typeface="Roboto Condensed" pitchFamily="34" charset="-122"/>
-                <a:cs typeface="Roboto Condensed" pitchFamily="34" charset="-120"/>
+                <a:latin typeface="Orbitron Bold" pitchFamily="34" charset="0"/>
+                <a:ea typeface="Orbitron Bold" pitchFamily="34" charset="-122"/>
+                <a:cs typeface="Orbitron Bold" pitchFamily="34" charset="-120"/>
+              </a:rPr>
+              <a:t>2</a:t>
+            </a:r>
+            <a:endParaRPr lang="en-US" sz="2200" dirty="0"/>
+          </a:p>
+        </p:txBody>
+      </p:sp>
+      <p:sp>
+        <p:nvSpPr>
+          <p:cNvPr id="9" name="Text 6"/>
+          <p:cNvSpPr/>
+          <p:nvPr/>
+        </p:nvSpPr>
+        <p:spPr>
+          <a:xfrm>
+            <a:off x="5847608" y="3550543"/>
+            <a:ext cx="5682612" cy="295275"/>
+          </a:xfrm>
+          <a:prstGeom prst="rect">
+            <a:avLst/>
+          </a:prstGeom>
+          <a:noFill/>
+          <a:ln/>
+        </p:spPr>
+        <p:txBody>
+          <a:bodyPr wrap="none" lIns="0" tIns="0" rIns="0" bIns="0" rtlCol="0" anchor="t"/>
+          <a:lstStyle/>
+          <a:p>
+            <a:pPr algn="l" indent="0" marL="0">
+              <a:lnSpc>
+                <a:spcPct val="104000"/>
+              </a:lnSpc>
+              <a:buNone/>
+            </a:pPr>
+            <a:r>
+              <a:rPr lang="en-US" sz="1850" b="1" dirty="0">
+                <a:solidFill>
+                  <a:srgbClr val="1C1C1C"/>
+                </a:solidFill>
+                <a:latin typeface="Orbitron Bold" pitchFamily="34" charset="0"/>
+                <a:ea typeface="Orbitron Bold" pitchFamily="34" charset="-122"/>
+                <a:cs typeface="Orbitron Bold" pitchFamily="34" charset="-120"/>
               </a:rPr>
               <a:t>Give the strongest case for it</a:t>
             </a:r>
-            <a:endParaRPr lang="en-US" sz="1450" dirty="0"/>
-          </a:p>
-          <a:p>
-            <a:pPr algn="l" marL="294640" indent="-294640">
-              <a:lnSpc>
-                <a:spcPct val="133000"/>
-              </a:lnSpc>
-              <a:buSzPct val="100000"/>
-              <a:buChar char="•"/>
-            </a:pPr>
-            <a:r>
-              <a:rPr lang="en-US" sz="1450" dirty="0">
+            <a:endParaRPr lang="en-US" sz="1850" dirty="0"/>
+          </a:p>
+        </p:txBody>
+      </p:sp>
+      <p:sp>
+        <p:nvSpPr>
+          <p:cNvPr id="10" name="Shape 7"/>
+          <p:cNvSpPr/>
+          <p:nvPr/>
+        </p:nvSpPr>
+        <p:spPr>
+          <a:xfrm>
+            <a:off x="5233360" y="4288929"/>
+            <a:ext cx="425241" cy="425252"/>
+          </a:xfrm>
+          <a:prstGeom prst="roundRect">
+            <a:avLst>
+              <a:gd name="adj" fmla="val 18669"/>
+            </a:avLst>
+          </a:prstGeom>
+          <a:solidFill>
+            <a:srgbClr val="D1E5FA"/>
+          </a:solidFill>
+          <a:ln w="19050">
+            <a:solidFill>
+              <a:srgbClr val="B7CBE0"/>
+            </a:solidFill>
+            <a:prstDash val="solid"/>
+          </a:ln>
+        </p:spPr>
+      </p:sp>
+      <p:sp>
+        <p:nvSpPr>
+          <p:cNvPr id="11" name="Text 8"/>
+          <p:cNvSpPr/>
+          <p:nvPr/>
+        </p:nvSpPr>
+        <p:spPr>
+          <a:xfrm>
+            <a:off x="5304251" y="4324350"/>
+            <a:ext cx="283461" cy="354409"/>
+          </a:xfrm>
+          <a:prstGeom prst="rect">
+            <a:avLst/>
+          </a:prstGeom>
+          <a:noFill/>
+          <a:ln/>
+        </p:spPr>
+        <p:txBody>
+          <a:bodyPr wrap="none" lIns="0" tIns="0" rIns="0" bIns="0" rtlCol="0" anchor="ctr"/>
+          <a:lstStyle/>
+          <a:p>
+            <a:pPr algn="ctr" indent="0" marL="0">
+              <a:lnSpc>
+                <a:spcPct val="100000"/>
+              </a:lnSpc>
+              <a:buNone/>
+            </a:pPr>
+            <a:r>
+              <a:rPr lang="en-US" sz="2200" b="1" dirty="0">
                 <a:solidFill>
                   <a:srgbClr val="1C1C1C"/>
                 </a:solidFill>
-                <a:latin typeface="Roboto Condensed" pitchFamily="34" charset="0"/>
-                <a:ea typeface="Roboto Condensed" pitchFamily="34" charset="-122"/>
-                <a:cs typeface="Roboto Condensed" pitchFamily="34" charset="-120"/>
+                <a:latin typeface="Orbitron Bold" pitchFamily="34" charset="0"/>
+                <a:ea typeface="Orbitron Bold" pitchFamily="34" charset="-122"/>
+                <a:cs typeface="Orbitron Bold" pitchFamily="34" charset="-120"/>
+              </a:rPr>
+              <a:t>3</a:t>
+            </a:r>
+            <a:endParaRPr lang="en-US" sz="2200" dirty="0"/>
+          </a:p>
+        </p:txBody>
+      </p:sp>
+      <p:sp>
+        <p:nvSpPr>
+          <p:cNvPr id="12" name="Text 9"/>
+          <p:cNvSpPr/>
+          <p:nvPr/>
+        </p:nvSpPr>
+        <p:spPr>
+          <a:xfrm>
+            <a:off x="5847608" y="4353818"/>
+            <a:ext cx="5682612" cy="295275"/>
+          </a:xfrm>
+          <a:prstGeom prst="rect">
+            <a:avLst/>
+          </a:prstGeom>
+          <a:noFill/>
+          <a:ln/>
+        </p:spPr>
+        <p:txBody>
+          <a:bodyPr wrap="none" lIns="0" tIns="0" rIns="0" bIns="0" rtlCol="0" anchor="t"/>
+          <a:lstStyle/>
+          <a:p>
+            <a:pPr algn="l" indent="0" marL="0">
+              <a:lnSpc>
+                <a:spcPct val="104000"/>
+              </a:lnSpc>
+              <a:buNone/>
+            </a:pPr>
+            <a:r>
+              <a:rPr lang="en-US" sz="1850" b="1" dirty="0">
+                <a:solidFill>
+                  <a:srgbClr val="1C1C1C"/>
+                </a:solidFill>
+                <a:latin typeface="Orbitron Bold" pitchFamily="34" charset="0"/>
+                <a:ea typeface="Orbitron Bold" pitchFamily="34" charset="-122"/>
+                <a:cs typeface="Orbitron Bold" pitchFamily="34" charset="-120"/>
               </a:rPr>
               <a:t>Give the strongest case against it</a:t>
             </a:r>
-            <a:endParaRPr lang="en-US" sz="1450" dirty="0"/>
-          </a:p>
-          <a:p>
-            <a:pPr algn="l" marL="294640" indent="-294640">
-              <a:lnSpc>
-                <a:spcPct val="133000"/>
-              </a:lnSpc>
-              <a:buSzPct val="100000"/>
-              <a:buChar char="•"/>
-            </a:pPr>
-            <a:r>
-              <a:rPr lang="en-US" sz="1450" dirty="0">
+            <a:endParaRPr lang="en-US" sz="1850" dirty="0"/>
+          </a:p>
+        </p:txBody>
+      </p:sp>
+      <p:sp>
+        <p:nvSpPr>
+          <p:cNvPr id="13" name="Shape 10"/>
+          <p:cNvSpPr/>
+          <p:nvPr/>
+        </p:nvSpPr>
+        <p:spPr>
+          <a:xfrm>
+            <a:off x="5233360" y="5092204"/>
+            <a:ext cx="425241" cy="425252"/>
+          </a:xfrm>
+          <a:prstGeom prst="roundRect">
+            <a:avLst>
+              <a:gd name="adj" fmla="val 18669"/>
+            </a:avLst>
+          </a:prstGeom>
+          <a:solidFill>
+            <a:srgbClr val="D1E5FA"/>
+          </a:solidFill>
+          <a:ln w="19050">
+            <a:solidFill>
+              <a:srgbClr val="B7CBE0"/>
+            </a:solidFill>
+            <a:prstDash val="solid"/>
+          </a:ln>
+        </p:spPr>
+      </p:sp>
+      <p:sp>
+        <p:nvSpPr>
+          <p:cNvPr id="14" name="Text 11"/>
+          <p:cNvSpPr/>
+          <p:nvPr/>
+        </p:nvSpPr>
+        <p:spPr>
+          <a:xfrm>
+            <a:off x="5304251" y="5127625"/>
+            <a:ext cx="283461" cy="354409"/>
+          </a:xfrm>
+          <a:prstGeom prst="rect">
+            <a:avLst/>
+          </a:prstGeom>
+          <a:noFill/>
+          <a:ln/>
+        </p:spPr>
+        <p:txBody>
+          <a:bodyPr wrap="none" lIns="0" tIns="0" rIns="0" bIns="0" rtlCol="0" anchor="ctr"/>
+          <a:lstStyle/>
+          <a:p>
+            <a:pPr algn="ctr" indent="0" marL="0">
+              <a:lnSpc>
+                <a:spcPct val="100000"/>
+              </a:lnSpc>
+              <a:buNone/>
+            </a:pPr>
+            <a:r>
+              <a:rPr lang="en-US" sz="2200" b="1" dirty="0">
                 <a:solidFill>
                   <a:srgbClr val="1C1C1C"/>
                 </a:solidFill>
-                <a:latin typeface="Roboto Condensed" pitchFamily="34" charset="0"/>
-                <a:ea typeface="Roboto Condensed" pitchFamily="34" charset="-122"/>
-                <a:cs typeface="Roboto Condensed" pitchFamily="34" charset="-120"/>
+                <a:latin typeface="Orbitron Bold" pitchFamily="34" charset="0"/>
+                <a:ea typeface="Orbitron Bold" pitchFamily="34" charset="-122"/>
+                <a:cs typeface="Orbitron Bold" pitchFamily="34" charset="-120"/>
+              </a:rPr>
+              <a:t>4</a:t>
+            </a:r>
+            <a:endParaRPr lang="en-US" sz="2200" dirty="0"/>
+          </a:p>
+        </p:txBody>
+      </p:sp>
+      <p:sp>
+        <p:nvSpPr>
+          <p:cNvPr id="15" name="Text 12"/>
+          <p:cNvSpPr/>
+          <p:nvPr/>
+        </p:nvSpPr>
+        <p:spPr>
+          <a:xfrm>
+            <a:off x="5847608" y="5157093"/>
+            <a:ext cx="5682612" cy="295275"/>
+          </a:xfrm>
+          <a:prstGeom prst="rect">
+            <a:avLst/>
+          </a:prstGeom>
+          <a:noFill/>
+          <a:ln/>
+        </p:spPr>
+        <p:txBody>
+          <a:bodyPr wrap="none" lIns="0" tIns="0" rIns="0" bIns="0" rtlCol="0" anchor="t"/>
+          <a:lstStyle/>
+          <a:p>
+            <a:pPr algn="l" indent="0" marL="0">
+              <a:lnSpc>
+                <a:spcPct val="104000"/>
+              </a:lnSpc>
+              <a:buNone/>
+            </a:pPr>
+            <a:r>
+              <a:rPr lang="en-US" sz="1850" b="1" dirty="0">
+                <a:solidFill>
+                  <a:srgbClr val="1C1C1C"/>
+                </a:solidFill>
+                <a:latin typeface="Orbitron Bold" pitchFamily="34" charset="0"/>
+                <a:ea typeface="Orbitron Bold" pitchFamily="34" charset="-122"/>
+                <a:cs typeface="Orbitron Bold" pitchFamily="34" charset="-120"/>
               </a:rPr>
               <a:t>Say what would change your mind</a:t>
             </a:r>
-            <a:endParaRPr lang="en-US" sz="1450" dirty="0"/>
-          </a:p>
-        </p:txBody>
-      </p:sp>
-      <p:sp>
-        <p:nvSpPr>
-          <p:cNvPr id="5" name="Text 2"/>
-          <p:cNvSpPr/>
-          <p:nvPr/>
-        </p:nvSpPr>
-        <p:spPr>
-          <a:xfrm>
-            <a:off x="132255" y="6457255"/>
+            <a:endParaRPr lang="en-US" sz="1850" dirty="0"/>
+          </a:p>
+        </p:txBody>
+      </p:sp>
+      <p:sp>
+        <p:nvSpPr>
+          <p:cNvPr id="16" name="Text 13"/>
+          <p:cNvSpPr/>
+          <p:nvPr/>
+        </p:nvSpPr>
+        <p:spPr>
+          <a:xfrm>
+            <a:off x="4704141" y="6457255"/>
             <a:ext cx="3640642" cy="158750"/>
           </a:xfrm>
           <a:prstGeom prst="rect">
@@ -5350,7 +6172,7 @@
           <a:ln/>
         </p:spPr>
         <p:txBody>
-          <a:bodyPr wrap="none" lIns="0" tIns="99235" rIns="59541" bIns="0" rtlCol="0" anchor="t"/>
+          <a:bodyPr wrap="none" lIns="99235" tIns="0" rIns="59541" bIns="0" rtlCol="0" anchor="t"/>
           <a:lstStyle/>
           <a:p>
             <a:pPr algn="l" indent="0" marL="0">
